--- a/projects/cns-pharmacology-practical/slides/ch06-skeletal-muscle-relaxants.pptx
+++ b/projects/cns-pharmacology-practical/slides/ch06-skeletal-muscle-relaxants.pptx
@@ -7351,7 +7351,7 @@
                 </a:solidFill>
                 <a:latin typeface="Calibri"/>
               </a:rPr>
-              <a:t>45 minutes  ·  10 questions</a:t>
+              <a:t>120 minutes  ·  10 questions</a:t>
             </a:r>
           </a:p>
         </p:txBody>
@@ -12949,7 +12949,7 @@
                 </a:solidFill>
                 <a:latin typeface="Cambria"/>
               </a:rPr>
-              <a:t>45</a:t>
+              <a:t>120</a:t>
             </a:r>
           </a:p>
           <a:p>

--- a/projects/cns-pharmacology-practical/slides/ch06-skeletal-muscle-relaxants.pptx
+++ b/projects/cns-pharmacology-practical/slides/ch06-skeletal-muscle-relaxants.pptx
@@ -5961,9 +5961,113 @@
           </a:prstGeom>
         </p:spPr>
       </p:pic>
+      <p:sp>
+        <p:nvSpPr>
+          <p:cNvPr id="11" name="Rounded Rectangle 10"/>
+          <p:cNvSpPr/>
+          <p:nvPr/>
+        </p:nvSpPr>
+        <p:spPr>
+          <a:xfrm>
+            <a:off x="411479" y="1444752"/>
+            <a:ext cx="11368735" cy="4800600"/>
+          </a:xfrm>
+          <a:prstGeom prst="roundRect">
+            <a:avLst>
+              <a:gd name="adj" fmla="val 4000"/>
+            </a:avLst>
+          </a:prstGeom>
+          <a:solidFill>
+            <a:srgbClr val="FFFFFF">
+              <a:alpha val="84000"/>
+            </a:srgbClr>
+          </a:solidFill>
+          <a:ln w="19050">
+            <a:solidFill>
+              <a:srgbClr val="FFFFFF"/>
+            </a:solidFill>
+          </a:ln>
+          <a:effectLst>
+            <a:outerShdw blurRad="203200" dist="50800" dir="5400000" algn="t" rotWithShape="0">
+              <a:srgbClr val="1A2340">
+                <a:alpha val="20000"/>
+              </a:srgbClr>
+            </a:outerShdw>
+          </a:effectLst>
+        </p:spPr>
+        <p:style>
+          <a:lnRef idx="1">
+            <a:schemeClr val="accent1"/>
+          </a:lnRef>
+          <a:fillRef idx="3">
+            <a:schemeClr val="accent1"/>
+          </a:fillRef>
+          <a:effectRef idx="2">
+            <a:schemeClr val="accent1"/>
+          </a:effectRef>
+          <a:fontRef idx="minor">
+            <a:schemeClr val="lt1"/>
+          </a:fontRef>
+        </p:style>
+        <p:txBody>
+          <a:bodyPr rtlCol="0" anchor="ctr"/>
+          <a:lstStyle/>
+          <a:p>
+            <a:pPr algn="ctr"/>
+          </a:p>
+        </p:txBody>
+      </p:sp>
+      <p:sp>
+        <p:nvSpPr>
+          <p:cNvPr id="12" name="Rounded Rectangle 11"/>
+          <p:cNvSpPr/>
+          <p:nvPr/>
+        </p:nvSpPr>
+        <p:spPr>
+          <a:xfrm>
+            <a:off x="731519" y="1508760"/>
+            <a:ext cx="10728655" cy="32004"/>
+          </a:xfrm>
+          <a:prstGeom prst="roundRect">
+            <a:avLst>
+              <a:gd name="adj" fmla="val 50000"/>
+            </a:avLst>
+          </a:prstGeom>
+          <a:solidFill>
+            <a:srgbClr val="FFFFFF">
+              <a:alpha val="85000"/>
+            </a:srgbClr>
+          </a:solidFill>
+          <a:ln>
+            <a:noFill/>
+          </a:ln>
+          <a:effectLst/>
+        </p:spPr>
+        <p:style>
+          <a:lnRef idx="1">
+            <a:schemeClr val="accent1"/>
+          </a:lnRef>
+          <a:fillRef idx="3">
+            <a:schemeClr val="accent1"/>
+          </a:fillRef>
+          <a:effectRef idx="2">
+            <a:schemeClr val="accent1"/>
+          </a:effectRef>
+          <a:fontRef idx="minor">
+            <a:schemeClr val="lt1"/>
+          </a:fontRef>
+        </p:style>
+        <p:txBody>
+          <a:bodyPr rtlCol="0" anchor="ctr"/>
+          <a:lstStyle/>
+          <a:p>
+            <a:pPr algn="ctr"/>
+          </a:p>
+        </p:txBody>
+      </p:sp>
       <p:graphicFrame>
         <p:nvGraphicFramePr>
-          <p:cNvPr id="11" name="Table 10"/>
+          <p:cNvPr id="13" name="Table 12"/>
           <p:cNvGraphicFramePr>
             <a:graphicFrameLocks noGrp="1"/>
           </p:cNvGraphicFramePr>
@@ -6779,14 +6883,177 @@
       </p:pic>
       <p:sp>
         <p:nvSpPr>
-          <p:cNvPr id="11" name="TextBox 10"/>
+          <p:cNvPr id="11" name="Rounded Rectangle 10"/>
+          <p:cNvSpPr/>
+          <p:nvPr/>
+        </p:nvSpPr>
+        <p:spPr>
+          <a:xfrm>
+            <a:off x="411479" y="1444752"/>
+            <a:ext cx="11368735" cy="4800600"/>
+          </a:xfrm>
+          <a:prstGeom prst="roundRect">
+            <a:avLst>
+              <a:gd name="adj" fmla="val 4000"/>
+            </a:avLst>
+          </a:prstGeom>
+          <a:solidFill>
+            <a:srgbClr val="FFFFFF">
+              <a:alpha val="84000"/>
+            </a:srgbClr>
+          </a:solidFill>
+          <a:ln w="19050">
+            <a:solidFill>
+              <a:srgbClr val="FFFFFF"/>
+            </a:solidFill>
+          </a:ln>
+          <a:effectLst>
+            <a:outerShdw blurRad="203200" dist="50800" dir="5400000" algn="t" rotWithShape="0">
+              <a:srgbClr val="1A2340">
+                <a:alpha val="20000"/>
+              </a:srgbClr>
+            </a:outerShdw>
+          </a:effectLst>
+        </p:spPr>
+        <p:style>
+          <a:lnRef idx="1">
+            <a:schemeClr val="accent1"/>
+          </a:lnRef>
+          <a:fillRef idx="3">
+            <a:schemeClr val="accent1"/>
+          </a:fillRef>
+          <a:effectRef idx="2">
+            <a:schemeClr val="accent1"/>
+          </a:effectRef>
+          <a:fontRef idx="minor">
+            <a:schemeClr val="lt1"/>
+          </a:fontRef>
+        </p:style>
+        <p:txBody>
+          <a:bodyPr rtlCol="0" anchor="ctr"/>
+          <a:lstStyle/>
+          <a:p>
+            <a:pPr algn="ctr"/>
+          </a:p>
+        </p:txBody>
+      </p:sp>
+      <p:sp>
+        <p:nvSpPr>
+          <p:cNvPr id="12" name="Rounded Rectangle 11"/>
+          <p:cNvSpPr/>
+          <p:nvPr/>
+        </p:nvSpPr>
+        <p:spPr>
+          <a:xfrm>
+            <a:off x="731519" y="1508760"/>
+            <a:ext cx="10728655" cy="32004"/>
+          </a:xfrm>
+          <a:prstGeom prst="roundRect">
+            <a:avLst>
+              <a:gd name="adj" fmla="val 50000"/>
+            </a:avLst>
+          </a:prstGeom>
+          <a:solidFill>
+            <a:srgbClr val="FFFFFF">
+              <a:alpha val="85000"/>
+            </a:srgbClr>
+          </a:solidFill>
+          <a:ln>
+            <a:noFill/>
+          </a:ln>
+          <a:effectLst/>
+        </p:spPr>
+        <p:style>
+          <a:lnRef idx="1">
+            <a:schemeClr val="accent1"/>
+          </a:lnRef>
+          <a:fillRef idx="3">
+            <a:schemeClr val="accent1"/>
+          </a:fillRef>
+          <a:effectRef idx="2">
+            <a:schemeClr val="accent1"/>
+          </a:effectRef>
+          <a:fontRef idx="minor">
+            <a:schemeClr val="lt1"/>
+          </a:fontRef>
+        </p:style>
+        <p:txBody>
+          <a:bodyPr rtlCol="0" anchor="ctr"/>
+          <a:lstStyle/>
+          <a:p>
+            <a:pPr algn="ctr"/>
+          </a:p>
+        </p:txBody>
+      </p:sp>
+      <p:sp>
+        <p:nvSpPr>
+          <p:cNvPr id="13" name="Rounded Rectangle 12"/>
+          <p:cNvSpPr/>
+          <p:nvPr/>
+        </p:nvSpPr>
+        <p:spPr>
+          <a:xfrm>
+            <a:off x="548640" y="1591056"/>
+            <a:ext cx="64008" cy="315468"/>
+          </a:xfrm>
+          <a:prstGeom prst="roundRect">
+            <a:avLst>
+              <a:gd name="adj" fmla="val 50000"/>
+            </a:avLst>
+          </a:prstGeom>
+          <a:solidFill>
+            <a:srgbClr val="8D6A2A"/>
+          </a:solidFill>
+          <a:ln>
+            <a:noFill/>
+          </a:ln>
+          <a:effectLst>
+            <a:outerShdw blurRad="203200" dist="50800" dir="5400000" algn="t" rotWithShape="0">
+              <a:srgbClr val="1A2340">
+                <a:alpha val="20000"/>
+              </a:srgbClr>
+            </a:outerShdw>
+          </a:effectLst>
+          <a:scene3d>
+            <a:camera prst="orthographicFront"/>
+            <a:lightRig rig="threePt" dir="t"/>
+          </a:scene3d>
+          <a:sp3d>
+            <a:bevelT w="44450" h="25400" prst="softRound"/>
+          </a:sp3d>
+        </p:spPr>
+        <p:style>
+          <a:lnRef idx="1">
+            <a:schemeClr val="accent1"/>
+          </a:lnRef>
+          <a:fillRef idx="3">
+            <a:schemeClr val="accent1"/>
+          </a:fillRef>
+          <a:effectRef idx="2">
+            <a:schemeClr val="accent1"/>
+          </a:effectRef>
+          <a:fontRef idx="minor">
+            <a:schemeClr val="lt1"/>
+          </a:fontRef>
+        </p:style>
+        <p:txBody>
+          <a:bodyPr rtlCol="0" anchor="ctr"/>
+          <a:lstStyle/>
+          <a:p>
+            <a:pPr algn="ctr"/>
+          </a:p>
+        </p:txBody>
+      </p:sp>
+      <p:sp>
+        <p:nvSpPr>
+          <p:cNvPr id="14" name="TextBox 13"/>
           <p:cNvSpPr txBox="1"/>
           <p:nvPr/>
         </p:nvSpPr>
         <p:spPr>
           <a:xfrm>
-            <a:off x="548640" y="1554480"/>
-            <a:ext cx="11094415" cy="498348"/>
+            <a:off x="777240" y="1554480"/>
+            <a:ext cx="10865815" cy="498348"/>
           </a:xfrm>
           <a:prstGeom prst="rect">
             <a:avLst/>
@@ -6818,7 +7085,7 @@
       </p:sp>
       <p:graphicFrame>
         <p:nvGraphicFramePr>
-          <p:cNvPr id="12" name="Table 11"/>
+          <p:cNvPr id="15" name="Table 14"/>
           <p:cNvGraphicFramePr>
             <a:graphicFrameLocks noGrp="1"/>
           </p:cNvGraphicFramePr>
@@ -7545,9 +7812,113 @@
           </a:prstGeom>
         </p:spPr>
       </p:pic>
+      <p:sp>
+        <p:nvSpPr>
+          <p:cNvPr id="11" name="Rounded Rectangle 10"/>
+          <p:cNvSpPr/>
+          <p:nvPr/>
+        </p:nvSpPr>
+        <p:spPr>
+          <a:xfrm>
+            <a:off x="411479" y="1444752"/>
+            <a:ext cx="11368735" cy="4800600"/>
+          </a:xfrm>
+          <a:prstGeom prst="roundRect">
+            <a:avLst>
+              <a:gd name="adj" fmla="val 4000"/>
+            </a:avLst>
+          </a:prstGeom>
+          <a:solidFill>
+            <a:srgbClr val="FFFFFF">
+              <a:alpha val="84000"/>
+            </a:srgbClr>
+          </a:solidFill>
+          <a:ln w="19050">
+            <a:solidFill>
+              <a:srgbClr val="FFFFFF"/>
+            </a:solidFill>
+          </a:ln>
+          <a:effectLst>
+            <a:outerShdw blurRad="203200" dist="50800" dir="5400000" algn="t" rotWithShape="0">
+              <a:srgbClr val="1A2340">
+                <a:alpha val="20000"/>
+              </a:srgbClr>
+            </a:outerShdw>
+          </a:effectLst>
+        </p:spPr>
+        <p:style>
+          <a:lnRef idx="1">
+            <a:schemeClr val="accent1"/>
+          </a:lnRef>
+          <a:fillRef idx="3">
+            <a:schemeClr val="accent1"/>
+          </a:fillRef>
+          <a:effectRef idx="2">
+            <a:schemeClr val="accent1"/>
+          </a:effectRef>
+          <a:fontRef idx="minor">
+            <a:schemeClr val="lt1"/>
+          </a:fontRef>
+        </p:style>
+        <p:txBody>
+          <a:bodyPr rtlCol="0" anchor="ctr"/>
+          <a:lstStyle/>
+          <a:p>
+            <a:pPr algn="ctr"/>
+          </a:p>
+        </p:txBody>
+      </p:sp>
+      <p:sp>
+        <p:nvSpPr>
+          <p:cNvPr id="12" name="Rounded Rectangle 11"/>
+          <p:cNvSpPr/>
+          <p:nvPr/>
+        </p:nvSpPr>
+        <p:spPr>
+          <a:xfrm>
+            <a:off x="731519" y="1508760"/>
+            <a:ext cx="10728655" cy="32004"/>
+          </a:xfrm>
+          <a:prstGeom prst="roundRect">
+            <a:avLst>
+              <a:gd name="adj" fmla="val 50000"/>
+            </a:avLst>
+          </a:prstGeom>
+          <a:solidFill>
+            <a:srgbClr val="FFFFFF">
+              <a:alpha val="85000"/>
+            </a:srgbClr>
+          </a:solidFill>
+          <a:ln>
+            <a:noFill/>
+          </a:ln>
+          <a:effectLst/>
+        </p:spPr>
+        <p:style>
+          <a:lnRef idx="1">
+            <a:schemeClr val="accent1"/>
+          </a:lnRef>
+          <a:fillRef idx="3">
+            <a:schemeClr val="accent1"/>
+          </a:fillRef>
+          <a:effectRef idx="2">
+            <a:schemeClr val="accent1"/>
+          </a:effectRef>
+          <a:fontRef idx="minor">
+            <a:schemeClr val="lt1"/>
+          </a:fontRef>
+        </p:style>
+        <p:txBody>
+          <a:bodyPr rtlCol="0" anchor="ctr"/>
+          <a:lstStyle/>
+          <a:p>
+            <a:pPr algn="ctr"/>
+          </a:p>
+        </p:txBody>
+      </p:sp>
       <p:graphicFrame>
         <p:nvGraphicFramePr>
-          <p:cNvPr id="11" name="Table 10"/>
+          <p:cNvPr id="13" name="Table 12"/>
           <p:cNvGraphicFramePr>
             <a:graphicFrameLocks noGrp="1"/>
           </p:cNvGraphicFramePr>
@@ -8369,6 +8740,110 @@
         </p:nvSpPr>
         <p:spPr>
           <a:xfrm>
+            <a:off x="411479" y="1444752"/>
+            <a:ext cx="11368735" cy="4800600"/>
+          </a:xfrm>
+          <a:prstGeom prst="roundRect">
+            <a:avLst>
+              <a:gd name="adj" fmla="val 4000"/>
+            </a:avLst>
+          </a:prstGeom>
+          <a:solidFill>
+            <a:srgbClr val="FFFFFF">
+              <a:alpha val="84000"/>
+            </a:srgbClr>
+          </a:solidFill>
+          <a:ln w="19050">
+            <a:solidFill>
+              <a:srgbClr val="FFFFFF"/>
+            </a:solidFill>
+          </a:ln>
+          <a:effectLst>
+            <a:outerShdw blurRad="203200" dist="50800" dir="5400000" algn="t" rotWithShape="0">
+              <a:srgbClr val="1A2340">
+                <a:alpha val="20000"/>
+              </a:srgbClr>
+            </a:outerShdw>
+          </a:effectLst>
+        </p:spPr>
+        <p:style>
+          <a:lnRef idx="1">
+            <a:schemeClr val="accent1"/>
+          </a:lnRef>
+          <a:fillRef idx="3">
+            <a:schemeClr val="accent1"/>
+          </a:fillRef>
+          <a:effectRef idx="2">
+            <a:schemeClr val="accent1"/>
+          </a:effectRef>
+          <a:fontRef idx="minor">
+            <a:schemeClr val="lt1"/>
+          </a:fontRef>
+        </p:style>
+        <p:txBody>
+          <a:bodyPr rtlCol="0" anchor="ctr"/>
+          <a:lstStyle/>
+          <a:p>
+            <a:pPr algn="ctr"/>
+          </a:p>
+        </p:txBody>
+      </p:sp>
+      <p:sp>
+        <p:nvSpPr>
+          <p:cNvPr id="12" name="Rounded Rectangle 11"/>
+          <p:cNvSpPr/>
+          <p:nvPr/>
+        </p:nvSpPr>
+        <p:spPr>
+          <a:xfrm>
+            <a:off x="731519" y="1508760"/>
+            <a:ext cx="10728655" cy="32004"/>
+          </a:xfrm>
+          <a:prstGeom prst="roundRect">
+            <a:avLst>
+              <a:gd name="adj" fmla="val 50000"/>
+            </a:avLst>
+          </a:prstGeom>
+          <a:solidFill>
+            <a:srgbClr val="FFFFFF">
+              <a:alpha val="85000"/>
+            </a:srgbClr>
+          </a:solidFill>
+          <a:ln>
+            <a:noFill/>
+          </a:ln>
+          <a:effectLst/>
+        </p:spPr>
+        <p:style>
+          <a:lnRef idx="1">
+            <a:schemeClr val="accent1"/>
+          </a:lnRef>
+          <a:fillRef idx="3">
+            <a:schemeClr val="accent1"/>
+          </a:fillRef>
+          <a:effectRef idx="2">
+            <a:schemeClr val="accent1"/>
+          </a:effectRef>
+          <a:fontRef idx="minor">
+            <a:schemeClr val="lt1"/>
+          </a:fontRef>
+        </p:style>
+        <p:txBody>
+          <a:bodyPr rtlCol="0" anchor="ctr"/>
+          <a:lstStyle/>
+          <a:p>
+            <a:pPr algn="ctr"/>
+          </a:p>
+        </p:txBody>
+      </p:sp>
+      <p:sp>
+        <p:nvSpPr>
+          <p:cNvPr id="13" name="Rounded Rectangle 12"/>
+          <p:cNvSpPr/>
+          <p:nvPr/>
+        </p:nvSpPr>
+        <p:spPr>
+          <a:xfrm>
             <a:off x="1645919" y="2103120"/>
             <a:ext cx="8899855" cy="2431288"/>
           </a:xfrm>
@@ -8419,7 +8894,7 @@
       </p:sp>
       <p:sp>
         <p:nvSpPr>
-          <p:cNvPr id="12" name="Rounded Rectangle 11"/>
+          <p:cNvPr id="14" name="Rounded Rectangle 13"/>
           <p:cNvSpPr/>
           <p:nvPr/>
         </p:nvSpPr>
@@ -8467,7 +8942,7 @@
       </p:sp>
       <p:sp>
         <p:nvSpPr>
-          <p:cNvPr id="13" name="Rounded Rectangle 12"/>
+          <p:cNvPr id="15" name="Rounded Rectangle 14"/>
           <p:cNvSpPr/>
           <p:nvPr/>
         </p:nvSpPr>
@@ -8535,7 +9010,7 @@
       </p:sp>
       <p:sp>
         <p:nvSpPr>
-          <p:cNvPr id="14" name="TextBox 13"/>
+          <p:cNvPr id="16" name="TextBox 15"/>
           <p:cNvSpPr txBox="1"/>
           <p:nvPr/>
         </p:nvSpPr>
@@ -8979,6 +9454,110 @@
         </p:nvSpPr>
         <p:spPr>
           <a:xfrm>
+            <a:off x="411479" y="1444752"/>
+            <a:ext cx="11368735" cy="4800600"/>
+          </a:xfrm>
+          <a:prstGeom prst="roundRect">
+            <a:avLst>
+              <a:gd name="adj" fmla="val 4000"/>
+            </a:avLst>
+          </a:prstGeom>
+          <a:solidFill>
+            <a:srgbClr val="FFFFFF">
+              <a:alpha val="84000"/>
+            </a:srgbClr>
+          </a:solidFill>
+          <a:ln w="19050">
+            <a:solidFill>
+              <a:srgbClr val="FFFFFF"/>
+            </a:solidFill>
+          </a:ln>
+          <a:effectLst>
+            <a:outerShdw blurRad="203200" dist="50800" dir="5400000" algn="t" rotWithShape="0">
+              <a:srgbClr val="1A2340">
+                <a:alpha val="20000"/>
+              </a:srgbClr>
+            </a:outerShdw>
+          </a:effectLst>
+        </p:spPr>
+        <p:style>
+          <a:lnRef idx="1">
+            <a:schemeClr val="accent1"/>
+          </a:lnRef>
+          <a:fillRef idx="3">
+            <a:schemeClr val="accent1"/>
+          </a:fillRef>
+          <a:effectRef idx="2">
+            <a:schemeClr val="accent1"/>
+          </a:effectRef>
+          <a:fontRef idx="minor">
+            <a:schemeClr val="lt1"/>
+          </a:fontRef>
+        </p:style>
+        <p:txBody>
+          <a:bodyPr rtlCol="0" anchor="ctr"/>
+          <a:lstStyle/>
+          <a:p>
+            <a:pPr algn="ctr"/>
+          </a:p>
+        </p:txBody>
+      </p:sp>
+      <p:sp>
+        <p:nvSpPr>
+          <p:cNvPr id="12" name="Rounded Rectangle 11"/>
+          <p:cNvSpPr/>
+          <p:nvPr/>
+        </p:nvSpPr>
+        <p:spPr>
+          <a:xfrm>
+            <a:off x="731519" y="1508760"/>
+            <a:ext cx="10728655" cy="32004"/>
+          </a:xfrm>
+          <a:prstGeom prst="roundRect">
+            <a:avLst>
+              <a:gd name="adj" fmla="val 50000"/>
+            </a:avLst>
+          </a:prstGeom>
+          <a:solidFill>
+            <a:srgbClr val="FFFFFF">
+              <a:alpha val="85000"/>
+            </a:srgbClr>
+          </a:solidFill>
+          <a:ln>
+            <a:noFill/>
+          </a:ln>
+          <a:effectLst/>
+        </p:spPr>
+        <p:style>
+          <a:lnRef idx="1">
+            <a:schemeClr val="accent1"/>
+          </a:lnRef>
+          <a:fillRef idx="3">
+            <a:schemeClr val="accent1"/>
+          </a:fillRef>
+          <a:effectRef idx="2">
+            <a:schemeClr val="accent1"/>
+          </a:effectRef>
+          <a:fontRef idx="minor">
+            <a:schemeClr val="lt1"/>
+          </a:fontRef>
+        </p:style>
+        <p:txBody>
+          <a:bodyPr rtlCol="0" anchor="ctr"/>
+          <a:lstStyle/>
+          <a:p>
+            <a:pPr algn="ctr"/>
+          </a:p>
+        </p:txBody>
+      </p:sp>
+      <p:sp>
+        <p:nvSpPr>
+          <p:cNvPr id="13" name="Rounded Rectangle 12"/>
+          <p:cNvSpPr/>
+          <p:nvPr/>
+        </p:nvSpPr>
+        <p:spPr>
+          <a:xfrm>
             <a:off x="1645919" y="2103120"/>
             <a:ext cx="8899855" cy="2377440"/>
           </a:xfrm>
@@ -9029,7 +9608,7 @@
       </p:sp>
       <p:sp>
         <p:nvSpPr>
-          <p:cNvPr id="12" name="Rounded Rectangle 11"/>
+          <p:cNvPr id="14" name="Rounded Rectangle 13"/>
           <p:cNvSpPr/>
           <p:nvPr/>
         </p:nvSpPr>
@@ -9077,7 +9656,7 @@
       </p:sp>
       <p:sp>
         <p:nvSpPr>
-          <p:cNvPr id="13" name="Rounded Rectangle 12"/>
+          <p:cNvPr id="15" name="Rounded Rectangle 14"/>
           <p:cNvSpPr/>
           <p:nvPr/>
         </p:nvSpPr>
@@ -9145,7 +9724,7 @@
       </p:sp>
       <p:sp>
         <p:nvSpPr>
-          <p:cNvPr id="14" name="TextBox 13"/>
+          <p:cNvPr id="16" name="TextBox 15"/>
           <p:cNvSpPr txBox="1"/>
           <p:nvPr/>
         </p:nvSpPr>
@@ -9601,7 +10180,111 @@
       </p:pic>
       <p:sp>
         <p:nvSpPr>
-          <p:cNvPr id="11" name="Oval 10"/>
+          <p:cNvPr id="11" name="Rounded Rectangle 10"/>
+          <p:cNvSpPr/>
+          <p:nvPr/>
+        </p:nvSpPr>
+        <p:spPr>
+          <a:xfrm>
+            <a:off x="411479" y="1444752"/>
+            <a:ext cx="11368735" cy="4800600"/>
+          </a:xfrm>
+          <a:prstGeom prst="roundRect">
+            <a:avLst>
+              <a:gd name="adj" fmla="val 4000"/>
+            </a:avLst>
+          </a:prstGeom>
+          <a:solidFill>
+            <a:srgbClr val="FFFFFF">
+              <a:alpha val="84000"/>
+            </a:srgbClr>
+          </a:solidFill>
+          <a:ln w="19050">
+            <a:solidFill>
+              <a:srgbClr val="FFFFFF"/>
+            </a:solidFill>
+          </a:ln>
+          <a:effectLst>
+            <a:outerShdw blurRad="203200" dist="50800" dir="5400000" algn="t" rotWithShape="0">
+              <a:srgbClr val="1A2340">
+                <a:alpha val="20000"/>
+              </a:srgbClr>
+            </a:outerShdw>
+          </a:effectLst>
+        </p:spPr>
+        <p:style>
+          <a:lnRef idx="1">
+            <a:schemeClr val="accent1"/>
+          </a:lnRef>
+          <a:fillRef idx="3">
+            <a:schemeClr val="accent1"/>
+          </a:fillRef>
+          <a:effectRef idx="2">
+            <a:schemeClr val="accent1"/>
+          </a:effectRef>
+          <a:fontRef idx="minor">
+            <a:schemeClr val="lt1"/>
+          </a:fontRef>
+        </p:style>
+        <p:txBody>
+          <a:bodyPr rtlCol="0" anchor="ctr"/>
+          <a:lstStyle/>
+          <a:p>
+            <a:pPr algn="ctr"/>
+          </a:p>
+        </p:txBody>
+      </p:sp>
+      <p:sp>
+        <p:nvSpPr>
+          <p:cNvPr id="12" name="Rounded Rectangle 11"/>
+          <p:cNvSpPr/>
+          <p:nvPr/>
+        </p:nvSpPr>
+        <p:spPr>
+          <a:xfrm>
+            <a:off x="731519" y="1508760"/>
+            <a:ext cx="10728655" cy="32004"/>
+          </a:xfrm>
+          <a:prstGeom prst="roundRect">
+            <a:avLst>
+              <a:gd name="adj" fmla="val 50000"/>
+            </a:avLst>
+          </a:prstGeom>
+          <a:solidFill>
+            <a:srgbClr val="FFFFFF">
+              <a:alpha val="85000"/>
+            </a:srgbClr>
+          </a:solidFill>
+          <a:ln>
+            <a:noFill/>
+          </a:ln>
+          <a:effectLst/>
+        </p:spPr>
+        <p:style>
+          <a:lnRef idx="1">
+            <a:schemeClr val="accent1"/>
+          </a:lnRef>
+          <a:fillRef idx="3">
+            <a:schemeClr val="accent1"/>
+          </a:fillRef>
+          <a:effectRef idx="2">
+            <a:schemeClr val="accent1"/>
+          </a:effectRef>
+          <a:fontRef idx="minor">
+            <a:schemeClr val="lt1"/>
+          </a:fontRef>
+        </p:style>
+        <p:txBody>
+          <a:bodyPr rtlCol="0" anchor="ctr"/>
+          <a:lstStyle/>
+          <a:p>
+            <a:pPr algn="ctr"/>
+          </a:p>
+        </p:txBody>
+      </p:sp>
+      <p:sp>
+        <p:nvSpPr>
+          <p:cNvPr id="13" name="Oval 12"/>
           <p:cNvSpPr/>
           <p:nvPr/>
         </p:nvSpPr>
@@ -9654,7 +10337,7 @@
       </p:sp>
       <p:sp>
         <p:nvSpPr>
-          <p:cNvPr id="12" name="TextBox 11"/>
+          <p:cNvPr id="14" name="TextBox 13"/>
           <p:cNvSpPr txBox="1"/>
           <p:nvPr/>
         </p:nvSpPr>
@@ -9706,7 +10389,7 @@
       </p:sp>
       <p:sp>
         <p:nvSpPr>
-          <p:cNvPr id="13" name="Oval 12"/>
+          <p:cNvPr id="15" name="Oval 14"/>
           <p:cNvSpPr/>
           <p:nvPr/>
         </p:nvSpPr>
@@ -9759,7 +10442,7 @@
       </p:sp>
       <p:sp>
         <p:nvSpPr>
-          <p:cNvPr id="14" name="TextBox 13"/>
+          <p:cNvPr id="16" name="TextBox 15"/>
           <p:cNvSpPr txBox="1"/>
           <p:nvPr/>
         </p:nvSpPr>
@@ -9841,6 +10524,110 @@
           </a:prstGeom>
         </p:spPr>
       </p:pic>
+      <p:sp>
+        <p:nvSpPr>
+          <p:cNvPr id="10" name="Rounded Rectangle 9"/>
+          <p:cNvSpPr/>
+          <p:nvPr/>
+        </p:nvSpPr>
+        <p:spPr>
+          <a:xfrm>
+            <a:off x="4251960" y="548640"/>
+            <a:ext cx="7635240" cy="5715000"/>
+          </a:xfrm>
+          <a:prstGeom prst="roundRect">
+            <a:avLst>
+              <a:gd name="adj" fmla="val 4000"/>
+            </a:avLst>
+          </a:prstGeom>
+          <a:solidFill>
+            <a:srgbClr val="FFFFFF">
+              <a:alpha val="84000"/>
+            </a:srgbClr>
+          </a:solidFill>
+          <a:ln w="19050">
+            <a:solidFill>
+              <a:srgbClr val="FFFFFF"/>
+            </a:solidFill>
+          </a:ln>
+          <a:effectLst>
+            <a:outerShdw blurRad="203200" dist="50800" dir="5400000" algn="t" rotWithShape="0">
+              <a:srgbClr val="1A2340">
+                <a:alpha val="20000"/>
+              </a:srgbClr>
+            </a:outerShdw>
+          </a:effectLst>
+        </p:spPr>
+        <p:style>
+          <a:lnRef idx="1">
+            <a:schemeClr val="accent1"/>
+          </a:lnRef>
+          <a:fillRef idx="3">
+            <a:schemeClr val="accent1"/>
+          </a:fillRef>
+          <a:effectRef idx="2">
+            <a:schemeClr val="accent1"/>
+          </a:effectRef>
+          <a:fontRef idx="minor">
+            <a:schemeClr val="lt1"/>
+          </a:fontRef>
+        </p:style>
+        <p:txBody>
+          <a:bodyPr rtlCol="0" anchor="ctr"/>
+          <a:lstStyle/>
+          <a:p>
+            <a:pPr algn="ctr"/>
+          </a:p>
+        </p:txBody>
+      </p:sp>
+      <p:sp>
+        <p:nvSpPr>
+          <p:cNvPr id="11" name="Rounded Rectangle 10"/>
+          <p:cNvSpPr/>
+          <p:nvPr/>
+        </p:nvSpPr>
+        <p:spPr>
+          <a:xfrm>
+            <a:off x="4572000" y="612647"/>
+            <a:ext cx="6995159" cy="32004"/>
+          </a:xfrm>
+          <a:prstGeom prst="roundRect">
+            <a:avLst>
+              <a:gd name="adj" fmla="val 50000"/>
+            </a:avLst>
+          </a:prstGeom>
+          <a:solidFill>
+            <a:srgbClr val="FFFFFF">
+              <a:alpha val="85000"/>
+            </a:srgbClr>
+          </a:solidFill>
+          <a:ln>
+            <a:noFill/>
+          </a:ln>
+          <a:effectLst/>
+        </p:spPr>
+        <p:style>
+          <a:lnRef idx="1">
+            <a:schemeClr val="accent1"/>
+          </a:lnRef>
+          <a:fillRef idx="3">
+            <a:schemeClr val="accent1"/>
+          </a:fillRef>
+          <a:effectRef idx="2">
+            <a:schemeClr val="accent1"/>
+          </a:effectRef>
+          <a:fontRef idx="minor">
+            <a:schemeClr val="lt1"/>
+          </a:fontRef>
+        </p:style>
+        <p:txBody>
+          <a:bodyPr rtlCol="0" anchor="ctr"/>
+          <a:lstStyle/>
+          <a:p>
+            <a:pPr algn="ctr"/>
+          </a:p>
+        </p:txBody>
+      </p:sp>
       <p:sp>
         <p:nvSpPr>
           <p:cNvPr id="3" name="Rectangle 2"/>
@@ -10582,9 +11369,113 @@
           </a:prstGeom>
         </p:spPr>
       </p:pic>
+      <p:sp>
+        <p:nvSpPr>
+          <p:cNvPr id="11" name="Rounded Rectangle 10"/>
+          <p:cNvSpPr/>
+          <p:nvPr/>
+        </p:nvSpPr>
+        <p:spPr>
+          <a:xfrm>
+            <a:off x="411479" y="1444752"/>
+            <a:ext cx="11368735" cy="4800600"/>
+          </a:xfrm>
+          <a:prstGeom prst="roundRect">
+            <a:avLst>
+              <a:gd name="adj" fmla="val 4000"/>
+            </a:avLst>
+          </a:prstGeom>
+          <a:solidFill>
+            <a:srgbClr val="FFFFFF">
+              <a:alpha val="84000"/>
+            </a:srgbClr>
+          </a:solidFill>
+          <a:ln w="19050">
+            <a:solidFill>
+              <a:srgbClr val="FFFFFF"/>
+            </a:solidFill>
+          </a:ln>
+          <a:effectLst>
+            <a:outerShdw blurRad="203200" dist="50800" dir="5400000" algn="t" rotWithShape="0">
+              <a:srgbClr val="1A2340">
+                <a:alpha val="20000"/>
+              </a:srgbClr>
+            </a:outerShdw>
+          </a:effectLst>
+        </p:spPr>
+        <p:style>
+          <a:lnRef idx="1">
+            <a:schemeClr val="accent1"/>
+          </a:lnRef>
+          <a:fillRef idx="3">
+            <a:schemeClr val="accent1"/>
+          </a:fillRef>
+          <a:effectRef idx="2">
+            <a:schemeClr val="accent1"/>
+          </a:effectRef>
+          <a:fontRef idx="minor">
+            <a:schemeClr val="lt1"/>
+          </a:fontRef>
+        </p:style>
+        <p:txBody>
+          <a:bodyPr rtlCol="0" anchor="ctr"/>
+          <a:lstStyle/>
+          <a:p>
+            <a:pPr algn="ctr"/>
+          </a:p>
+        </p:txBody>
+      </p:sp>
+      <p:sp>
+        <p:nvSpPr>
+          <p:cNvPr id="12" name="Rounded Rectangle 11"/>
+          <p:cNvSpPr/>
+          <p:nvPr/>
+        </p:nvSpPr>
+        <p:spPr>
+          <a:xfrm>
+            <a:off x="731519" y="1508760"/>
+            <a:ext cx="10728655" cy="32004"/>
+          </a:xfrm>
+          <a:prstGeom prst="roundRect">
+            <a:avLst>
+              <a:gd name="adj" fmla="val 50000"/>
+            </a:avLst>
+          </a:prstGeom>
+          <a:solidFill>
+            <a:srgbClr val="FFFFFF">
+              <a:alpha val="85000"/>
+            </a:srgbClr>
+          </a:solidFill>
+          <a:ln>
+            <a:noFill/>
+          </a:ln>
+          <a:effectLst/>
+        </p:spPr>
+        <p:style>
+          <a:lnRef idx="1">
+            <a:schemeClr val="accent1"/>
+          </a:lnRef>
+          <a:fillRef idx="3">
+            <a:schemeClr val="accent1"/>
+          </a:fillRef>
+          <a:effectRef idx="2">
+            <a:schemeClr val="accent1"/>
+          </a:effectRef>
+          <a:fontRef idx="minor">
+            <a:schemeClr val="lt1"/>
+          </a:fontRef>
+        </p:style>
+        <p:txBody>
+          <a:bodyPr rtlCol="0" anchor="ctr"/>
+          <a:lstStyle/>
+          <a:p>
+            <a:pPr algn="ctr"/>
+          </a:p>
+        </p:txBody>
+      </p:sp>
       <p:graphicFrame>
         <p:nvGraphicFramePr>
-          <p:cNvPr id="11" name="Table 10"/>
+          <p:cNvPr id="13" name="Table 12"/>
           <p:cNvGraphicFramePr>
             <a:graphicFrameLocks noGrp="1"/>
           </p:cNvGraphicFramePr>
@@ -11536,7 +12427,111 @@
       </p:pic>
       <p:sp>
         <p:nvSpPr>
-          <p:cNvPr id="11" name="Oval 10"/>
+          <p:cNvPr id="11" name="Rounded Rectangle 10"/>
+          <p:cNvSpPr/>
+          <p:nvPr/>
+        </p:nvSpPr>
+        <p:spPr>
+          <a:xfrm>
+            <a:off x="411479" y="1444752"/>
+            <a:ext cx="11368735" cy="4800600"/>
+          </a:xfrm>
+          <a:prstGeom prst="roundRect">
+            <a:avLst>
+              <a:gd name="adj" fmla="val 4000"/>
+            </a:avLst>
+          </a:prstGeom>
+          <a:solidFill>
+            <a:srgbClr val="FFFFFF">
+              <a:alpha val="84000"/>
+            </a:srgbClr>
+          </a:solidFill>
+          <a:ln w="19050">
+            <a:solidFill>
+              <a:srgbClr val="FFFFFF"/>
+            </a:solidFill>
+          </a:ln>
+          <a:effectLst>
+            <a:outerShdw blurRad="203200" dist="50800" dir="5400000" algn="t" rotWithShape="0">
+              <a:srgbClr val="1A2340">
+                <a:alpha val="20000"/>
+              </a:srgbClr>
+            </a:outerShdw>
+          </a:effectLst>
+        </p:spPr>
+        <p:style>
+          <a:lnRef idx="1">
+            <a:schemeClr val="accent1"/>
+          </a:lnRef>
+          <a:fillRef idx="3">
+            <a:schemeClr val="accent1"/>
+          </a:fillRef>
+          <a:effectRef idx="2">
+            <a:schemeClr val="accent1"/>
+          </a:effectRef>
+          <a:fontRef idx="minor">
+            <a:schemeClr val="lt1"/>
+          </a:fontRef>
+        </p:style>
+        <p:txBody>
+          <a:bodyPr rtlCol="0" anchor="ctr"/>
+          <a:lstStyle/>
+          <a:p>
+            <a:pPr algn="ctr"/>
+          </a:p>
+        </p:txBody>
+      </p:sp>
+      <p:sp>
+        <p:nvSpPr>
+          <p:cNvPr id="12" name="Rounded Rectangle 11"/>
+          <p:cNvSpPr/>
+          <p:nvPr/>
+        </p:nvSpPr>
+        <p:spPr>
+          <a:xfrm>
+            <a:off x="731519" y="1508760"/>
+            <a:ext cx="10728655" cy="32004"/>
+          </a:xfrm>
+          <a:prstGeom prst="roundRect">
+            <a:avLst>
+              <a:gd name="adj" fmla="val 50000"/>
+            </a:avLst>
+          </a:prstGeom>
+          <a:solidFill>
+            <a:srgbClr val="FFFFFF">
+              <a:alpha val="85000"/>
+            </a:srgbClr>
+          </a:solidFill>
+          <a:ln>
+            <a:noFill/>
+          </a:ln>
+          <a:effectLst/>
+        </p:spPr>
+        <p:style>
+          <a:lnRef idx="1">
+            <a:schemeClr val="accent1"/>
+          </a:lnRef>
+          <a:fillRef idx="3">
+            <a:schemeClr val="accent1"/>
+          </a:fillRef>
+          <a:effectRef idx="2">
+            <a:schemeClr val="accent1"/>
+          </a:effectRef>
+          <a:fontRef idx="minor">
+            <a:schemeClr val="lt1"/>
+          </a:fontRef>
+        </p:style>
+        <p:txBody>
+          <a:bodyPr rtlCol="0" anchor="ctr"/>
+          <a:lstStyle/>
+          <a:p>
+            <a:pPr algn="ctr"/>
+          </a:p>
+        </p:txBody>
+      </p:sp>
+      <p:sp>
+        <p:nvSpPr>
+          <p:cNvPr id="13" name="Oval 12"/>
           <p:cNvSpPr/>
           <p:nvPr/>
         </p:nvSpPr>
@@ -11589,7 +12584,7 @@
       </p:sp>
       <p:sp>
         <p:nvSpPr>
-          <p:cNvPr id="12" name="TextBox 11"/>
+          <p:cNvPr id="14" name="TextBox 13"/>
           <p:cNvSpPr txBox="1"/>
           <p:nvPr/>
         </p:nvSpPr>
@@ -11623,7 +12618,7 @@
       </p:sp>
       <p:sp>
         <p:nvSpPr>
-          <p:cNvPr id="13" name="Oval 12"/>
+          <p:cNvPr id="15" name="Oval 14"/>
           <p:cNvSpPr/>
           <p:nvPr/>
         </p:nvSpPr>
@@ -11676,7 +12671,7 @@
       </p:sp>
       <p:sp>
         <p:nvSpPr>
-          <p:cNvPr id="14" name="TextBox 13"/>
+          <p:cNvPr id="16" name="TextBox 15"/>
           <p:cNvSpPr txBox="1"/>
           <p:nvPr/>
         </p:nvSpPr>
@@ -11710,7 +12705,7 @@
       </p:sp>
       <p:sp>
         <p:nvSpPr>
-          <p:cNvPr id="15" name="Oval 14"/>
+          <p:cNvPr id="17" name="Oval 16"/>
           <p:cNvSpPr/>
           <p:nvPr/>
         </p:nvSpPr>
@@ -11763,7 +12758,7 @@
       </p:sp>
       <p:sp>
         <p:nvSpPr>
-          <p:cNvPr id="16" name="TextBox 15"/>
+          <p:cNvPr id="18" name="TextBox 17"/>
           <p:cNvSpPr txBox="1"/>
           <p:nvPr/>
         </p:nvSpPr>
@@ -12178,7 +13173,111 @@
       </p:pic>
       <p:sp>
         <p:nvSpPr>
-          <p:cNvPr id="11" name="TextBox 10"/>
+          <p:cNvPr id="11" name="Rounded Rectangle 10"/>
+          <p:cNvSpPr/>
+          <p:nvPr/>
+        </p:nvSpPr>
+        <p:spPr>
+          <a:xfrm>
+            <a:off x="411479" y="1444752"/>
+            <a:ext cx="11368735" cy="4800600"/>
+          </a:xfrm>
+          <a:prstGeom prst="roundRect">
+            <a:avLst>
+              <a:gd name="adj" fmla="val 4000"/>
+            </a:avLst>
+          </a:prstGeom>
+          <a:solidFill>
+            <a:srgbClr val="FFFFFF">
+              <a:alpha val="84000"/>
+            </a:srgbClr>
+          </a:solidFill>
+          <a:ln w="19050">
+            <a:solidFill>
+              <a:srgbClr val="FFFFFF"/>
+            </a:solidFill>
+          </a:ln>
+          <a:effectLst>
+            <a:outerShdw blurRad="203200" dist="50800" dir="5400000" algn="t" rotWithShape="0">
+              <a:srgbClr val="1A2340">
+                <a:alpha val="20000"/>
+              </a:srgbClr>
+            </a:outerShdw>
+          </a:effectLst>
+        </p:spPr>
+        <p:style>
+          <a:lnRef idx="1">
+            <a:schemeClr val="accent1"/>
+          </a:lnRef>
+          <a:fillRef idx="3">
+            <a:schemeClr val="accent1"/>
+          </a:fillRef>
+          <a:effectRef idx="2">
+            <a:schemeClr val="accent1"/>
+          </a:effectRef>
+          <a:fontRef idx="minor">
+            <a:schemeClr val="lt1"/>
+          </a:fontRef>
+        </p:style>
+        <p:txBody>
+          <a:bodyPr rtlCol="0" anchor="ctr"/>
+          <a:lstStyle/>
+          <a:p>
+            <a:pPr algn="ctr"/>
+          </a:p>
+        </p:txBody>
+      </p:sp>
+      <p:sp>
+        <p:nvSpPr>
+          <p:cNvPr id="12" name="Rounded Rectangle 11"/>
+          <p:cNvSpPr/>
+          <p:nvPr/>
+        </p:nvSpPr>
+        <p:spPr>
+          <a:xfrm>
+            <a:off x="731519" y="1508760"/>
+            <a:ext cx="10728655" cy="32004"/>
+          </a:xfrm>
+          <a:prstGeom prst="roundRect">
+            <a:avLst>
+              <a:gd name="adj" fmla="val 50000"/>
+            </a:avLst>
+          </a:prstGeom>
+          <a:solidFill>
+            <a:srgbClr val="FFFFFF">
+              <a:alpha val="85000"/>
+            </a:srgbClr>
+          </a:solidFill>
+          <a:ln>
+            <a:noFill/>
+          </a:ln>
+          <a:effectLst/>
+        </p:spPr>
+        <p:style>
+          <a:lnRef idx="1">
+            <a:schemeClr val="accent1"/>
+          </a:lnRef>
+          <a:fillRef idx="3">
+            <a:schemeClr val="accent1"/>
+          </a:fillRef>
+          <a:effectRef idx="2">
+            <a:schemeClr val="accent1"/>
+          </a:effectRef>
+          <a:fontRef idx="minor">
+            <a:schemeClr val="lt1"/>
+          </a:fontRef>
+        </p:style>
+        <p:txBody>
+          <a:bodyPr rtlCol="0" anchor="ctr"/>
+          <a:lstStyle/>
+          <a:p>
+            <a:pPr algn="ctr"/>
+          </a:p>
+        </p:txBody>
+      </p:sp>
+      <p:sp>
+        <p:nvSpPr>
+          <p:cNvPr id="13" name="TextBox 12"/>
           <p:cNvSpPr txBox="1"/>
           <p:nvPr/>
         </p:nvSpPr>
@@ -12212,7 +13311,7 @@
       </p:sp>
       <p:sp>
         <p:nvSpPr>
-          <p:cNvPr id="12" name="Rounded Rectangle 11"/>
+          <p:cNvPr id="14" name="Rounded Rectangle 13"/>
           <p:cNvSpPr/>
           <p:nvPr/>
         </p:nvSpPr>
@@ -12268,7 +13367,7 @@
       </p:sp>
       <p:sp>
         <p:nvSpPr>
-          <p:cNvPr id="13" name="Oval 12"/>
+          <p:cNvPr id="15" name="Oval 14"/>
           <p:cNvSpPr/>
           <p:nvPr/>
         </p:nvSpPr>
@@ -12321,7 +13420,7 @@
       </p:sp>
       <p:sp>
         <p:nvSpPr>
-          <p:cNvPr id="14" name="TextBox 13"/>
+          <p:cNvPr id="16" name="TextBox 15"/>
           <p:cNvSpPr txBox="1"/>
           <p:nvPr/>
         </p:nvSpPr>
@@ -12355,7 +13454,7 @@
       </p:sp>
       <p:sp>
         <p:nvSpPr>
-          <p:cNvPr id="15" name="Rounded Rectangle 14"/>
+          <p:cNvPr id="17" name="Rounded Rectangle 16"/>
           <p:cNvSpPr/>
           <p:nvPr/>
         </p:nvSpPr>
@@ -12411,7 +13510,7 @@
       </p:sp>
       <p:sp>
         <p:nvSpPr>
-          <p:cNvPr id="16" name="Oval 15"/>
+          <p:cNvPr id="18" name="Oval 17"/>
           <p:cNvSpPr/>
           <p:nvPr/>
         </p:nvSpPr>
@@ -12464,7 +13563,7 @@
       </p:sp>
       <p:sp>
         <p:nvSpPr>
-          <p:cNvPr id="17" name="TextBox 16"/>
+          <p:cNvPr id="19" name="TextBox 18"/>
           <p:cNvSpPr txBox="1"/>
           <p:nvPr/>
         </p:nvSpPr>
@@ -12498,7 +13597,7 @@
       </p:sp>
       <p:sp>
         <p:nvSpPr>
-          <p:cNvPr id="18" name="Rounded Rectangle 17"/>
+          <p:cNvPr id="20" name="Rounded Rectangle 19"/>
           <p:cNvSpPr/>
           <p:nvPr/>
         </p:nvSpPr>
@@ -12554,7 +13653,7 @@
       </p:sp>
       <p:sp>
         <p:nvSpPr>
-          <p:cNvPr id="19" name="Oval 18"/>
+          <p:cNvPr id="21" name="Oval 20"/>
           <p:cNvSpPr/>
           <p:nvPr/>
         </p:nvSpPr>
@@ -12607,7 +13706,7 @@
       </p:sp>
       <p:sp>
         <p:nvSpPr>
-          <p:cNvPr id="20" name="TextBox 19"/>
+          <p:cNvPr id="22" name="TextBox 21"/>
           <p:cNvSpPr txBox="1"/>
           <p:nvPr/>
         </p:nvSpPr>
@@ -12641,7 +13740,7 @@
       </p:sp>
       <p:sp>
         <p:nvSpPr>
-          <p:cNvPr id="21" name="Rounded Rectangle 20"/>
+          <p:cNvPr id="23" name="Rounded Rectangle 22"/>
           <p:cNvSpPr/>
           <p:nvPr/>
         </p:nvSpPr>
@@ -12697,7 +13796,7 @@
       </p:sp>
       <p:sp>
         <p:nvSpPr>
-          <p:cNvPr id="22" name="Oval 21"/>
+          <p:cNvPr id="24" name="Oval 23"/>
           <p:cNvSpPr/>
           <p:nvPr/>
         </p:nvSpPr>
@@ -12750,7 +13849,7 @@
       </p:sp>
       <p:sp>
         <p:nvSpPr>
-          <p:cNvPr id="23" name="TextBox 22"/>
+          <p:cNvPr id="25" name="TextBox 24"/>
           <p:cNvSpPr txBox="1"/>
           <p:nvPr/>
         </p:nvSpPr>
@@ -13165,7 +14264,111 @@
       </p:pic>
       <p:sp>
         <p:nvSpPr>
-          <p:cNvPr id="11" name="Oval 10"/>
+          <p:cNvPr id="11" name="Rounded Rectangle 10"/>
+          <p:cNvSpPr/>
+          <p:nvPr/>
+        </p:nvSpPr>
+        <p:spPr>
+          <a:xfrm>
+            <a:off x="411479" y="1444752"/>
+            <a:ext cx="11368735" cy="4800600"/>
+          </a:xfrm>
+          <a:prstGeom prst="roundRect">
+            <a:avLst>
+              <a:gd name="adj" fmla="val 4000"/>
+            </a:avLst>
+          </a:prstGeom>
+          <a:solidFill>
+            <a:srgbClr val="FFFFFF">
+              <a:alpha val="84000"/>
+            </a:srgbClr>
+          </a:solidFill>
+          <a:ln w="19050">
+            <a:solidFill>
+              <a:srgbClr val="FFFFFF"/>
+            </a:solidFill>
+          </a:ln>
+          <a:effectLst>
+            <a:outerShdw blurRad="203200" dist="50800" dir="5400000" algn="t" rotWithShape="0">
+              <a:srgbClr val="1A2340">
+                <a:alpha val="20000"/>
+              </a:srgbClr>
+            </a:outerShdw>
+          </a:effectLst>
+        </p:spPr>
+        <p:style>
+          <a:lnRef idx="1">
+            <a:schemeClr val="accent1"/>
+          </a:lnRef>
+          <a:fillRef idx="3">
+            <a:schemeClr val="accent1"/>
+          </a:fillRef>
+          <a:effectRef idx="2">
+            <a:schemeClr val="accent1"/>
+          </a:effectRef>
+          <a:fontRef idx="minor">
+            <a:schemeClr val="lt1"/>
+          </a:fontRef>
+        </p:style>
+        <p:txBody>
+          <a:bodyPr rtlCol="0" anchor="ctr"/>
+          <a:lstStyle/>
+          <a:p>
+            <a:pPr algn="ctr"/>
+          </a:p>
+        </p:txBody>
+      </p:sp>
+      <p:sp>
+        <p:nvSpPr>
+          <p:cNvPr id="12" name="Rounded Rectangle 11"/>
+          <p:cNvSpPr/>
+          <p:nvPr/>
+        </p:nvSpPr>
+        <p:spPr>
+          <a:xfrm>
+            <a:off x="731519" y="1508760"/>
+            <a:ext cx="10728655" cy="32004"/>
+          </a:xfrm>
+          <a:prstGeom prst="roundRect">
+            <a:avLst>
+              <a:gd name="adj" fmla="val 50000"/>
+            </a:avLst>
+          </a:prstGeom>
+          <a:solidFill>
+            <a:srgbClr val="FFFFFF">
+              <a:alpha val="85000"/>
+            </a:srgbClr>
+          </a:solidFill>
+          <a:ln>
+            <a:noFill/>
+          </a:ln>
+          <a:effectLst/>
+        </p:spPr>
+        <p:style>
+          <a:lnRef idx="1">
+            <a:schemeClr val="accent1"/>
+          </a:lnRef>
+          <a:fillRef idx="3">
+            <a:schemeClr val="accent1"/>
+          </a:fillRef>
+          <a:effectRef idx="2">
+            <a:schemeClr val="accent1"/>
+          </a:effectRef>
+          <a:fontRef idx="minor">
+            <a:schemeClr val="lt1"/>
+          </a:fontRef>
+        </p:style>
+        <p:txBody>
+          <a:bodyPr rtlCol="0" anchor="ctr"/>
+          <a:lstStyle/>
+          <a:p>
+            <a:pPr algn="ctr"/>
+          </a:p>
+        </p:txBody>
+      </p:sp>
+      <p:sp>
+        <p:nvSpPr>
+          <p:cNvPr id="13" name="Oval 12"/>
           <p:cNvSpPr/>
           <p:nvPr/>
         </p:nvSpPr>
@@ -13218,7 +14421,7 @@
       </p:sp>
       <p:sp>
         <p:nvSpPr>
-          <p:cNvPr id="12" name="TextBox 11"/>
+          <p:cNvPr id="14" name="TextBox 13"/>
           <p:cNvSpPr txBox="1"/>
           <p:nvPr/>
         </p:nvSpPr>
@@ -13252,7 +14455,7 @@
       </p:sp>
       <p:sp>
         <p:nvSpPr>
-          <p:cNvPr id="13" name="Oval 12"/>
+          <p:cNvPr id="15" name="Oval 14"/>
           <p:cNvSpPr/>
           <p:nvPr/>
         </p:nvSpPr>
@@ -13305,7 +14508,7 @@
       </p:sp>
       <p:sp>
         <p:nvSpPr>
-          <p:cNvPr id="14" name="TextBox 13"/>
+          <p:cNvPr id="16" name="TextBox 15"/>
           <p:cNvSpPr txBox="1"/>
           <p:nvPr/>
         </p:nvSpPr>
@@ -13339,7 +14542,7 @@
       </p:sp>
       <p:sp>
         <p:nvSpPr>
-          <p:cNvPr id="15" name="Oval 14"/>
+          <p:cNvPr id="17" name="Oval 16"/>
           <p:cNvSpPr/>
           <p:nvPr/>
         </p:nvSpPr>
@@ -13392,7 +14595,7 @@
       </p:sp>
       <p:sp>
         <p:nvSpPr>
-          <p:cNvPr id="16" name="TextBox 15"/>
+          <p:cNvPr id="18" name="TextBox 17"/>
           <p:cNvSpPr txBox="1"/>
           <p:nvPr/>
         </p:nvSpPr>
@@ -13426,7 +14629,7 @@
       </p:sp>
       <p:sp>
         <p:nvSpPr>
-          <p:cNvPr id="17" name="Oval 16"/>
+          <p:cNvPr id="19" name="Oval 18"/>
           <p:cNvSpPr/>
           <p:nvPr/>
         </p:nvSpPr>
@@ -13479,7 +14682,7 @@
       </p:sp>
       <p:sp>
         <p:nvSpPr>
-          <p:cNvPr id="18" name="TextBox 17"/>
+          <p:cNvPr id="20" name="TextBox 19"/>
           <p:cNvSpPr txBox="1"/>
           <p:nvPr/>
         </p:nvSpPr>
@@ -13513,7 +14716,7 @@
       </p:sp>
       <p:sp>
         <p:nvSpPr>
-          <p:cNvPr id="19" name="Oval 18"/>
+          <p:cNvPr id="21" name="Oval 20"/>
           <p:cNvSpPr/>
           <p:nvPr/>
         </p:nvSpPr>
@@ -13566,7 +14769,7 @@
       </p:sp>
       <p:sp>
         <p:nvSpPr>
-          <p:cNvPr id="20" name="TextBox 19"/>
+          <p:cNvPr id="22" name="TextBox 21"/>
           <p:cNvSpPr txBox="1"/>
           <p:nvPr/>
         </p:nvSpPr>
@@ -13600,7 +14803,7 @@
       </p:sp>
       <p:sp>
         <p:nvSpPr>
-          <p:cNvPr id="21" name="Rounded Rectangle 20"/>
+          <p:cNvPr id="23" name="Rounded Rectangle 22"/>
           <p:cNvSpPr/>
           <p:nvPr/>
         </p:nvSpPr>
@@ -13656,7 +14859,7 @@
       </p:sp>
       <p:sp>
         <p:nvSpPr>
-          <p:cNvPr id="22" name="Rounded Rectangle 21"/>
+          <p:cNvPr id="24" name="Rounded Rectangle 23"/>
           <p:cNvSpPr/>
           <p:nvPr/>
         </p:nvSpPr>
@@ -13704,7 +14907,7 @@
       </p:sp>
       <p:sp>
         <p:nvSpPr>
-          <p:cNvPr id="23" name="TextBox 22"/>
+          <p:cNvPr id="25" name="TextBox 24"/>
           <p:cNvSpPr txBox="1"/>
           <p:nvPr/>
         </p:nvSpPr>
@@ -14162,7 +15365,111 @@
       </p:pic>
       <p:sp>
         <p:nvSpPr>
-          <p:cNvPr id="11" name="TextBox 10"/>
+          <p:cNvPr id="11" name="Rounded Rectangle 10"/>
+          <p:cNvSpPr/>
+          <p:nvPr/>
+        </p:nvSpPr>
+        <p:spPr>
+          <a:xfrm>
+            <a:off x="411479" y="1444752"/>
+            <a:ext cx="11368735" cy="4800600"/>
+          </a:xfrm>
+          <a:prstGeom prst="roundRect">
+            <a:avLst>
+              <a:gd name="adj" fmla="val 4000"/>
+            </a:avLst>
+          </a:prstGeom>
+          <a:solidFill>
+            <a:srgbClr val="FFFFFF">
+              <a:alpha val="84000"/>
+            </a:srgbClr>
+          </a:solidFill>
+          <a:ln w="19050">
+            <a:solidFill>
+              <a:srgbClr val="FFFFFF"/>
+            </a:solidFill>
+          </a:ln>
+          <a:effectLst>
+            <a:outerShdw blurRad="203200" dist="50800" dir="5400000" algn="t" rotWithShape="0">
+              <a:srgbClr val="1A2340">
+                <a:alpha val="20000"/>
+              </a:srgbClr>
+            </a:outerShdw>
+          </a:effectLst>
+        </p:spPr>
+        <p:style>
+          <a:lnRef idx="1">
+            <a:schemeClr val="accent1"/>
+          </a:lnRef>
+          <a:fillRef idx="3">
+            <a:schemeClr val="accent1"/>
+          </a:fillRef>
+          <a:effectRef idx="2">
+            <a:schemeClr val="accent1"/>
+          </a:effectRef>
+          <a:fontRef idx="minor">
+            <a:schemeClr val="lt1"/>
+          </a:fontRef>
+        </p:style>
+        <p:txBody>
+          <a:bodyPr rtlCol="0" anchor="ctr"/>
+          <a:lstStyle/>
+          <a:p>
+            <a:pPr algn="ctr"/>
+          </a:p>
+        </p:txBody>
+      </p:sp>
+      <p:sp>
+        <p:nvSpPr>
+          <p:cNvPr id="12" name="Rounded Rectangle 11"/>
+          <p:cNvSpPr/>
+          <p:nvPr/>
+        </p:nvSpPr>
+        <p:spPr>
+          <a:xfrm>
+            <a:off x="731519" y="1508760"/>
+            <a:ext cx="10728655" cy="32004"/>
+          </a:xfrm>
+          <a:prstGeom prst="roundRect">
+            <a:avLst>
+              <a:gd name="adj" fmla="val 50000"/>
+            </a:avLst>
+          </a:prstGeom>
+          <a:solidFill>
+            <a:srgbClr val="FFFFFF">
+              <a:alpha val="85000"/>
+            </a:srgbClr>
+          </a:solidFill>
+          <a:ln>
+            <a:noFill/>
+          </a:ln>
+          <a:effectLst/>
+        </p:spPr>
+        <p:style>
+          <a:lnRef idx="1">
+            <a:schemeClr val="accent1"/>
+          </a:lnRef>
+          <a:fillRef idx="3">
+            <a:schemeClr val="accent1"/>
+          </a:fillRef>
+          <a:effectRef idx="2">
+            <a:schemeClr val="accent1"/>
+          </a:effectRef>
+          <a:fontRef idx="minor">
+            <a:schemeClr val="lt1"/>
+          </a:fontRef>
+        </p:style>
+        <p:txBody>
+          <a:bodyPr rtlCol="0" anchor="ctr"/>
+          <a:lstStyle/>
+          <a:p>
+            <a:pPr algn="ctr"/>
+          </a:p>
+        </p:txBody>
+      </p:sp>
+      <p:sp>
+        <p:nvSpPr>
+          <p:cNvPr id="13" name="TextBox 12"/>
           <p:cNvSpPr txBox="1"/>
           <p:nvPr/>
         </p:nvSpPr>
@@ -14196,7 +15503,7 @@
       </p:sp>
       <p:sp>
         <p:nvSpPr>
-          <p:cNvPr id="12" name="Rounded Rectangle 11"/>
+          <p:cNvPr id="14" name="Rounded Rectangle 13"/>
           <p:cNvSpPr/>
           <p:nvPr/>
         </p:nvSpPr>
@@ -14255,7 +15562,7 @@
       </p:sp>
       <p:sp>
         <p:nvSpPr>
-          <p:cNvPr id="13" name="Oval 12"/>
+          <p:cNvPr id="15" name="Oval 14"/>
           <p:cNvSpPr/>
           <p:nvPr/>
         </p:nvSpPr>
@@ -14308,7 +15615,7 @@
       </p:sp>
       <p:sp>
         <p:nvSpPr>
-          <p:cNvPr id="14" name="TextBox 13"/>
+          <p:cNvPr id="16" name="TextBox 15"/>
           <p:cNvSpPr txBox="1"/>
           <p:nvPr/>
         </p:nvSpPr>
@@ -14342,7 +15649,7 @@
       </p:sp>
       <p:sp>
         <p:nvSpPr>
-          <p:cNvPr id="15" name="Rounded Rectangle 14"/>
+          <p:cNvPr id="17" name="Rounded Rectangle 16"/>
           <p:cNvSpPr/>
           <p:nvPr/>
         </p:nvSpPr>
@@ -14398,7 +15705,7 @@
       </p:sp>
       <p:sp>
         <p:nvSpPr>
-          <p:cNvPr id="16" name="Oval 15"/>
+          <p:cNvPr id="18" name="Oval 17"/>
           <p:cNvSpPr/>
           <p:nvPr/>
         </p:nvSpPr>
@@ -14451,7 +15758,7 @@
       </p:sp>
       <p:sp>
         <p:nvSpPr>
-          <p:cNvPr id="17" name="TextBox 16"/>
+          <p:cNvPr id="19" name="TextBox 18"/>
           <p:cNvSpPr txBox="1"/>
           <p:nvPr/>
         </p:nvSpPr>
@@ -14485,7 +15792,7 @@
       </p:sp>
       <p:sp>
         <p:nvSpPr>
-          <p:cNvPr id="18" name="Rounded Rectangle 17"/>
+          <p:cNvPr id="20" name="Rounded Rectangle 19"/>
           <p:cNvSpPr/>
           <p:nvPr/>
         </p:nvSpPr>
@@ -14541,7 +15848,7 @@
       </p:sp>
       <p:sp>
         <p:nvSpPr>
-          <p:cNvPr id="19" name="Oval 18"/>
+          <p:cNvPr id="21" name="Oval 20"/>
           <p:cNvSpPr/>
           <p:nvPr/>
         </p:nvSpPr>
@@ -14594,7 +15901,7 @@
       </p:sp>
       <p:sp>
         <p:nvSpPr>
-          <p:cNvPr id="20" name="TextBox 19"/>
+          <p:cNvPr id="22" name="TextBox 21"/>
           <p:cNvSpPr txBox="1"/>
           <p:nvPr/>
         </p:nvSpPr>
@@ -14628,7 +15935,7 @@
       </p:sp>
       <p:sp>
         <p:nvSpPr>
-          <p:cNvPr id="21" name="Rounded Rectangle 20"/>
+          <p:cNvPr id="23" name="Rounded Rectangle 22"/>
           <p:cNvSpPr/>
           <p:nvPr/>
         </p:nvSpPr>
@@ -14684,7 +15991,7 @@
       </p:sp>
       <p:sp>
         <p:nvSpPr>
-          <p:cNvPr id="22" name="Oval 21"/>
+          <p:cNvPr id="24" name="Oval 23"/>
           <p:cNvSpPr/>
           <p:nvPr/>
         </p:nvSpPr>
@@ -14737,7 +16044,7 @@
       </p:sp>
       <p:sp>
         <p:nvSpPr>
-          <p:cNvPr id="23" name="TextBox 22"/>
+          <p:cNvPr id="25" name="TextBox 24"/>
           <p:cNvSpPr txBox="1"/>
           <p:nvPr/>
         </p:nvSpPr>
@@ -14771,7 +16078,7 @@
       </p:sp>
       <p:sp>
         <p:nvSpPr>
-          <p:cNvPr id="24" name="TextBox 23"/>
+          <p:cNvPr id="26" name="TextBox 25"/>
           <p:cNvSpPr txBox="1"/>
           <p:nvPr/>
         </p:nvSpPr>
@@ -15195,7 +16502,111 @@
       </p:pic>
       <p:sp>
         <p:nvSpPr>
-          <p:cNvPr id="11" name="TextBox 10"/>
+          <p:cNvPr id="11" name="Rounded Rectangle 10"/>
+          <p:cNvSpPr/>
+          <p:nvPr/>
+        </p:nvSpPr>
+        <p:spPr>
+          <a:xfrm>
+            <a:off x="411479" y="1444752"/>
+            <a:ext cx="11368735" cy="4800600"/>
+          </a:xfrm>
+          <a:prstGeom prst="roundRect">
+            <a:avLst>
+              <a:gd name="adj" fmla="val 4000"/>
+            </a:avLst>
+          </a:prstGeom>
+          <a:solidFill>
+            <a:srgbClr val="FFFFFF">
+              <a:alpha val="84000"/>
+            </a:srgbClr>
+          </a:solidFill>
+          <a:ln w="19050">
+            <a:solidFill>
+              <a:srgbClr val="FFFFFF"/>
+            </a:solidFill>
+          </a:ln>
+          <a:effectLst>
+            <a:outerShdw blurRad="203200" dist="50800" dir="5400000" algn="t" rotWithShape="0">
+              <a:srgbClr val="1A2340">
+                <a:alpha val="20000"/>
+              </a:srgbClr>
+            </a:outerShdw>
+          </a:effectLst>
+        </p:spPr>
+        <p:style>
+          <a:lnRef idx="1">
+            <a:schemeClr val="accent1"/>
+          </a:lnRef>
+          <a:fillRef idx="3">
+            <a:schemeClr val="accent1"/>
+          </a:fillRef>
+          <a:effectRef idx="2">
+            <a:schemeClr val="accent1"/>
+          </a:effectRef>
+          <a:fontRef idx="minor">
+            <a:schemeClr val="lt1"/>
+          </a:fontRef>
+        </p:style>
+        <p:txBody>
+          <a:bodyPr rtlCol="0" anchor="ctr"/>
+          <a:lstStyle/>
+          <a:p>
+            <a:pPr algn="ctr"/>
+          </a:p>
+        </p:txBody>
+      </p:sp>
+      <p:sp>
+        <p:nvSpPr>
+          <p:cNvPr id="12" name="Rounded Rectangle 11"/>
+          <p:cNvSpPr/>
+          <p:nvPr/>
+        </p:nvSpPr>
+        <p:spPr>
+          <a:xfrm>
+            <a:off x="731519" y="1508760"/>
+            <a:ext cx="10728655" cy="32004"/>
+          </a:xfrm>
+          <a:prstGeom prst="roundRect">
+            <a:avLst>
+              <a:gd name="adj" fmla="val 50000"/>
+            </a:avLst>
+          </a:prstGeom>
+          <a:solidFill>
+            <a:srgbClr val="FFFFFF">
+              <a:alpha val="85000"/>
+            </a:srgbClr>
+          </a:solidFill>
+          <a:ln>
+            <a:noFill/>
+          </a:ln>
+          <a:effectLst/>
+        </p:spPr>
+        <p:style>
+          <a:lnRef idx="1">
+            <a:schemeClr val="accent1"/>
+          </a:lnRef>
+          <a:fillRef idx="3">
+            <a:schemeClr val="accent1"/>
+          </a:fillRef>
+          <a:effectRef idx="2">
+            <a:schemeClr val="accent1"/>
+          </a:effectRef>
+          <a:fontRef idx="minor">
+            <a:schemeClr val="lt1"/>
+          </a:fontRef>
+        </p:style>
+        <p:txBody>
+          <a:bodyPr rtlCol="0" anchor="ctr"/>
+          <a:lstStyle/>
+          <a:p>
+            <a:pPr algn="ctr"/>
+          </a:p>
+        </p:txBody>
+      </p:sp>
+      <p:sp>
+        <p:nvSpPr>
+          <p:cNvPr id="13" name="TextBox 12"/>
           <p:cNvSpPr txBox="1"/>
           <p:nvPr/>
         </p:nvSpPr>
@@ -15229,7 +16640,7 @@
       </p:sp>
       <p:sp>
         <p:nvSpPr>
-          <p:cNvPr id="12" name="Rounded Rectangle 11"/>
+          <p:cNvPr id="14" name="Rounded Rectangle 13"/>
           <p:cNvSpPr/>
           <p:nvPr/>
         </p:nvSpPr>
@@ -15285,7 +16696,7 @@
       </p:sp>
       <p:sp>
         <p:nvSpPr>
-          <p:cNvPr id="13" name="Oval 12"/>
+          <p:cNvPr id="15" name="Oval 14"/>
           <p:cNvSpPr/>
           <p:nvPr/>
         </p:nvSpPr>
@@ -15338,7 +16749,7 @@
       </p:sp>
       <p:sp>
         <p:nvSpPr>
-          <p:cNvPr id="14" name="TextBox 13"/>
+          <p:cNvPr id="16" name="TextBox 15"/>
           <p:cNvSpPr txBox="1"/>
           <p:nvPr/>
         </p:nvSpPr>
@@ -15372,7 +16783,7 @@
       </p:sp>
       <p:sp>
         <p:nvSpPr>
-          <p:cNvPr id="15" name="Rounded Rectangle 14"/>
+          <p:cNvPr id="17" name="Rounded Rectangle 16"/>
           <p:cNvSpPr/>
           <p:nvPr/>
         </p:nvSpPr>
@@ -15428,7 +16839,7 @@
       </p:sp>
       <p:sp>
         <p:nvSpPr>
-          <p:cNvPr id="16" name="Oval 15"/>
+          <p:cNvPr id="18" name="Oval 17"/>
           <p:cNvSpPr/>
           <p:nvPr/>
         </p:nvSpPr>
@@ -15481,7 +16892,7 @@
       </p:sp>
       <p:sp>
         <p:nvSpPr>
-          <p:cNvPr id="17" name="TextBox 16"/>
+          <p:cNvPr id="19" name="TextBox 18"/>
           <p:cNvSpPr txBox="1"/>
           <p:nvPr/>
         </p:nvSpPr>
@@ -15515,7 +16926,7 @@
       </p:sp>
       <p:sp>
         <p:nvSpPr>
-          <p:cNvPr id="18" name="Rounded Rectangle 17"/>
+          <p:cNvPr id="20" name="Rounded Rectangle 19"/>
           <p:cNvSpPr/>
           <p:nvPr/>
         </p:nvSpPr>
@@ -15571,7 +16982,7 @@
       </p:sp>
       <p:sp>
         <p:nvSpPr>
-          <p:cNvPr id="19" name="Oval 18"/>
+          <p:cNvPr id="21" name="Oval 20"/>
           <p:cNvSpPr/>
           <p:nvPr/>
         </p:nvSpPr>
@@ -15624,7 +17035,7 @@
       </p:sp>
       <p:sp>
         <p:nvSpPr>
-          <p:cNvPr id="20" name="TextBox 19"/>
+          <p:cNvPr id="22" name="TextBox 21"/>
           <p:cNvSpPr txBox="1"/>
           <p:nvPr/>
         </p:nvSpPr>
@@ -15658,7 +17069,7 @@
       </p:sp>
       <p:sp>
         <p:nvSpPr>
-          <p:cNvPr id="21" name="Rounded Rectangle 20"/>
+          <p:cNvPr id="23" name="Rounded Rectangle 22"/>
           <p:cNvSpPr/>
           <p:nvPr/>
         </p:nvSpPr>
@@ -15714,7 +17125,7 @@
       </p:sp>
       <p:sp>
         <p:nvSpPr>
-          <p:cNvPr id="22" name="Oval 21"/>
+          <p:cNvPr id="24" name="Oval 23"/>
           <p:cNvSpPr/>
           <p:nvPr/>
         </p:nvSpPr>
@@ -15767,7 +17178,7 @@
       </p:sp>
       <p:sp>
         <p:nvSpPr>
-          <p:cNvPr id="23" name="TextBox 22"/>
+          <p:cNvPr id="25" name="TextBox 24"/>
           <p:cNvSpPr txBox="1"/>
           <p:nvPr/>
         </p:nvSpPr>
@@ -16182,7 +17593,111 @@
       </p:pic>
       <p:sp>
         <p:nvSpPr>
-          <p:cNvPr id="11" name="TextBox 10"/>
+          <p:cNvPr id="11" name="Rounded Rectangle 10"/>
+          <p:cNvSpPr/>
+          <p:nvPr/>
+        </p:nvSpPr>
+        <p:spPr>
+          <a:xfrm>
+            <a:off x="411479" y="1444752"/>
+            <a:ext cx="11368735" cy="4800600"/>
+          </a:xfrm>
+          <a:prstGeom prst="roundRect">
+            <a:avLst>
+              <a:gd name="adj" fmla="val 4000"/>
+            </a:avLst>
+          </a:prstGeom>
+          <a:solidFill>
+            <a:srgbClr val="FFFFFF">
+              <a:alpha val="84000"/>
+            </a:srgbClr>
+          </a:solidFill>
+          <a:ln w="19050">
+            <a:solidFill>
+              <a:srgbClr val="FFFFFF"/>
+            </a:solidFill>
+          </a:ln>
+          <a:effectLst>
+            <a:outerShdw blurRad="203200" dist="50800" dir="5400000" algn="t" rotWithShape="0">
+              <a:srgbClr val="1A2340">
+                <a:alpha val="20000"/>
+              </a:srgbClr>
+            </a:outerShdw>
+          </a:effectLst>
+        </p:spPr>
+        <p:style>
+          <a:lnRef idx="1">
+            <a:schemeClr val="accent1"/>
+          </a:lnRef>
+          <a:fillRef idx="3">
+            <a:schemeClr val="accent1"/>
+          </a:fillRef>
+          <a:effectRef idx="2">
+            <a:schemeClr val="accent1"/>
+          </a:effectRef>
+          <a:fontRef idx="minor">
+            <a:schemeClr val="lt1"/>
+          </a:fontRef>
+        </p:style>
+        <p:txBody>
+          <a:bodyPr rtlCol="0" anchor="ctr"/>
+          <a:lstStyle/>
+          <a:p>
+            <a:pPr algn="ctr"/>
+          </a:p>
+        </p:txBody>
+      </p:sp>
+      <p:sp>
+        <p:nvSpPr>
+          <p:cNvPr id="12" name="Rounded Rectangle 11"/>
+          <p:cNvSpPr/>
+          <p:nvPr/>
+        </p:nvSpPr>
+        <p:spPr>
+          <a:xfrm>
+            <a:off x="731519" y="1508760"/>
+            <a:ext cx="10728655" cy="32004"/>
+          </a:xfrm>
+          <a:prstGeom prst="roundRect">
+            <a:avLst>
+              <a:gd name="adj" fmla="val 50000"/>
+            </a:avLst>
+          </a:prstGeom>
+          <a:solidFill>
+            <a:srgbClr val="FFFFFF">
+              <a:alpha val="85000"/>
+            </a:srgbClr>
+          </a:solidFill>
+          <a:ln>
+            <a:noFill/>
+          </a:ln>
+          <a:effectLst/>
+        </p:spPr>
+        <p:style>
+          <a:lnRef idx="1">
+            <a:schemeClr val="accent1"/>
+          </a:lnRef>
+          <a:fillRef idx="3">
+            <a:schemeClr val="accent1"/>
+          </a:fillRef>
+          <a:effectRef idx="2">
+            <a:schemeClr val="accent1"/>
+          </a:effectRef>
+          <a:fontRef idx="minor">
+            <a:schemeClr val="lt1"/>
+          </a:fontRef>
+        </p:style>
+        <p:txBody>
+          <a:bodyPr rtlCol="0" anchor="ctr"/>
+          <a:lstStyle/>
+          <a:p>
+            <a:pPr algn="ctr"/>
+          </a:p>
+        </p:txBody>
+      </p:sp>
+      <p:sp>
+        <p:nvSpPr>
+          <p:cNvPr id="13" name="TextBox 12"/>
           <p:cNvSpPr txBox="1"/>
           <p:nvPr/>
         </p:nvSpPr>
@@ -16216,7 +17731,7 @@
       </p:sp>
       <p:sp>
         <p:nvSpPr>
-          <p:cNvPr id="12" name="Rounded Rectangle 11"/>
+          <p:cNvPr id="14" name="Rounded Rectangle 13"/>
           <p:cNvSpPr/>
           <p:nvPr/>
         </p:nvSpPr>
@@ -16272,7 +17787,7 @@
       </p:sp>
       <p:sp>
         <p:nvSpPr>
-          <p:cNvPr id="13" name="Oval 12"/>
+          <p:cNvPr id="15" name="Oval 14"/>
           <p:cNvSpPr/>
           <p:nvPr/>
         </p:nvSpPr>
@@ -16325,7 +17840,7 @@
       </p:sp>
       <p:sp>
         <p:nvSpPr>
-          <p:cNvPr id="14" name="TextBox 13"/>
+          <p:cNvPr id="16" name="TextBox 15"/>
           <p:cNvSpPr txBox="1"/>
           <p:nvPr/>
         </p:nvSpPr>
@@ -16359,7 +17874,7 @@
       </p:sp>
       <p:sp>
         <p:nvSpPr>
-          <p:cNvPr id="15" name="Rounded Rectangle 14"/>
+          <p:cNvPr id="17" name="Rounded Rectangle 16"/>
           <p:cNvSpPr/>
           <p:nvPr/>
         </p:nvSpPr>
@@ -16415,7 +17930,7 @@
       </p:sp>
       <p:sp>
         <p:nvSpPr>
-          <p:cNvPr id="16" name="Oval 15"/>
+          <p:cNvPr id="18" name="Oval 17"/>
           <p:cNvSpPr/>
           <p:nvPr/>
         </p:nvSpPr>
@@ -16468,7 +17983,7 @@
       </p:sp>
       <p:sp>
         <p:nvSpPr>
-          <p:cNvPr id="17" name="TextBox 16"/>
+          <p:cNvPr id="19" name="TextBox 18"/>
           <p:cNvSpPr txBox="1"/>
           <p:nvPr/>
         </p:nvSpPr>
@@ -16502,7 +18017,7 @@
       </p:sp>
       <p:sp>
         <p:nvSpPr>
-          <p:cNvPr id="18" name="Rounded Rectangle 17"/>
+          <p:cNvPr id="20" name="Rounded Rectangle 19"/>
           <p:cNvSpPr/>
           <p:nvPr/>
         </p:nvSpPr>
@@ -16561,7 +18076,7 @@
       </p:sp>
       <p:sp>
         <p:nvSpPr>
-          <p:cNvPr id="19" name="Oval 18"/>
+          <p:cNvPr id="21" name="Oval 20"/>
           <p:cNvSpPr/>
           <p:nvPr/>
         </p:nvSpPr>
@@ -16614,7 +18129,7 @@
       </p:sp>
       <p:sp>
         <p:nvSpPr>
-          <p:cNvPr id="20" name="TextBox 19"/>
+          <p:cNvPr id="22" name="TextBox 21"/>
           <p:cNvSpPr txBox="1"/>
           <p:nvPr/>
         </p:nvSpPr>
@@ -16648,7 +18163,7 @@
       </p:sp>
       <p:sp>
         <p:nvSpPr>
-          <p:cNvPr id="21" name="Rounded Rectangle 20"/>
+          <p:cNvPr id="23" name="Rounded Rectangle 22"/>
           <p:cNvSpPr/>
           <p:nvPr/>
         </p:nvSpPr>
@@ -16704,7 +18219,7 @@
       </p:sp>
       <p:sp>
         <p:nvSpPr>
-          <p:cNvPr id="22" name="Oval 21"/>
+          <p:cNvPr id="24" name="Oval 23"/>
           <p:cNvSpPr/>
           <p:nvPr/>
         </p:nvSpPr>
@@ -16757,7 +18272,7 @@
       </p:sp>
       <p:sp>
         <p:nvSpPr>
-          <p:cNvPr id="23" name="TextBox 22"/>
+          <p:cNvPr id="25" name="TextBox 24"/>
           <p:cNvSpPr txBox="1"/>
           <p:nvPr/>
         </p:nvSpPr>
@@ -16791,7 +18306,7 @@
       </p:sp>
       <p:sp>
         <p:nvSpPr>
-          <p:cNvPr id="24" name="TextBox 23"/>
+          <p:cNvPr id="26" name="TextBox 25"/>
           <p:cNvSpPr txBox="1"/>
           <p:nvPr/>
         </p:nvSpPr>
@@ -17215,7 +18730,111 @@
       </p:pic>
       <p:sp>
         <p:nvSpPr>
-          <p:cNvPr id="11" name="TextBox 10"/>
+          <p:cNvPr id="11" name="Rounded Rectangle 10"/>
+          <p:cNvSpPr/>
+          <p:nvPr/>
+        </p:nvSpPr>
+        <p:spPr>
+          <a:xfrm>
+            <a:off x="411479" y="1444752"/>
+            <a:ext cx="11368735" cy="4800600"/>
+          </a:xfrm>
+          <a:prstGeom prst="roundRect">
+            <a:avLst>
+              <a:gd name="adj" fmla="val 4000"/>
+            </a:avLst>
+          </a:prstGeom>
+          <a:solidFill>
+            <a:srgbClr val="FFFFFF">
+              <a:alpha val="84000"/>
+            </a:srgbClr>
+          </a:solidFill>
+          <a:ln w="19050">
+            <a:solidFill>
+              <a:srgbClr val="FFFFFF"/>
+            </a:solidFill>
+          </a:ln>
+          <a:effectLst>
+            <a:outerShdw blurRad="203200" dist="50800" dir="5400000" algn="t" rotWithShape="0">
+              <a:srgbClr val="1A2340">
+                <a:alpha val="20000"/>
+              </a:srgbClr>
+            </a:outerShdw>
+          </a:effectLst>
+        </p:spPr>
+        <p:style>
+          <a:lnRef idx="1">
+            <a:schemeClr val="accent1"/>
+          </a:lnRef>
+          <a:fillRef idx="3">
+            <a:schemeClr val="accent1"/>
+          </a:fillRef>
+          <a:effectRef idx="2">
+            <a:schemeClr val="accent1"/>
+          </a:effectRef>
+          <a:fontRef idx="minor">
+            <a:schemeClr val="lt1"/>
+          </a:fontRef>
+        </p:style>
+        <p:txBody>
+          <a:bodyPr rtlCol="0" anchor="ctr"/>
+          <a:lstStyle/>
+          <a:p>
+            <a:pPr algn="ctr"/>
+          </a:p>
+        </p:txBody>
+      </p:sp>
+      <p:sp>
+        <p:nvSpPr>
+          <p:cNvPr id="12" name="Rounded Rectangle 11"/>
+          <p:cNvSpPr/>
+          <p:nvPr/>
+        </p:nvSpPr>
+        <p:spPr>
+          <a:xfrm>
+            <a:off x="731519" y="1508760"/>
+            <a:ext cx="10728655" cy="32004"/>
+          </a:xfrm>
+          <a:prstGeom prst="roundRect">
+            <a:avLst>
+              <a:gd name="adj" fmla="val 50000"/>
+            </a:avLst>
+          </a:prstGeom>
+          <a:solidFill>
+            <a:srgbClr val="FFFFFF">
+              <a:alpha val="85000"/>
+            </a:srgbClr>
+          </a:solidFill>
+          <a:ln>
+            <a:noFill/>
+          </a:ln>
+          <a:effectLst/>
+        </p:spPr>
+        <p:style>
+          <a:lnRef idx="1">
+            <a:schemeClr val="accent1"/>
+          </a:lnRef>
+          <a:fillRef idx="3">
+            <a:schemeClr val="accent1"/>
+          </a:fillRef>
+          <a:effectRef idx="2">
+            <a:schemeClr val="accent1"/>
+          </a:effectRef>
+          <a:fontRef idx="minor">
+            <a:schemeClr val="lt1"/>
+          </a:fontRef>
+        </p:style>
+        <p:txBody>
+          <a:bodyPr rtlCol="0" anchor="ctr"/>
+          <a:lstStyle/>
+          <a:p>
+            <a:pPr algn="ctr"/>
+          </a:p>
+        </p:txBody>
+      </p:sp>
+      <p:sp>
+        <p:nvSpPr>
+          <p:cNvPr id="13" name="TextBox 12"/>
           <p:cNvSpPr txBox="1"/>
           <p:nvPr/>
         </p:nvSpPr>
@@ -17249,7 +18868,7 @@
       </p:sp>
       <p:sp>
         <p:nvSpPr>
-          <p:cNvPr id="12" name="Rounded Rectangle 11"/>
+          <p:cNvPr id="14" name="Rounded Rectangle 13"/>
           <p:cNvSpPr/>
           <p:nvPr/>
         </p:nvSpPr>
@@ -17305,7 +18924,7 @@
       </p:sp>
       <p:sp>
         <p:nvSpPr>
-          <p:cNvPr id="13" name="Oval 12"/>
+          <p:cNvPr id="15" name="Oval 14"/>
           <p:cNvSpPr/>
           <p:nvPr/>
         </p:nvSpPr>
@@ -17358,7 +18977,7 @@
       </p:sp>
       <p:sp>
         <p:nvSpPr>
-          <p:cNvPr id="14" name="TextBox 13"/>
+          <p:cNvPr id="16" name="TextBox 15"/>
           <p:cNvSpPr txBox="1"/>
           <p:nvPr/>
         </p:nvSpPr>
@@ -17392,7 +19011,7 @@
       </p:sp>
       <p:sp>
         <p:nvSpPr>
-          <p:cNvPr id="15" name="Rounded Rectangle 14"/>
+          <p:cNvPr id="17" name="Rounded Rectangle 16"/>
           <p:cNvSpPr/>
           <p:nvPr/>
         </p:nvSpPr>
@@ -17448,7 +19067,7 @@
       </p:sp>
       <p:sp>
         <p:nvSpPr>
-          <p:cNvPr id="16" name="Oval 15"/>
+          <p:cNvPr id="18" name="Oval 17"/>
           <p:cNvSpPr/>
           <p:nvPr/>
         </p:nvSpPr>
@@ -17501,7 +19120,7 @@
       </p:sp>
       <p:sp>
         <p:nvSpPr>
-          <p:cNvPr id="17" name="TextBox 16"/>
+          <p:cNvPr id="19" name="TextBox 18"/>
           <p:cNvSpPr txBox="1"/>
           <p:nvPr/>
         </p:nvSpPr>
@@ -17535,7 +19154,7 @@
       </p:sp>
       <p:sp>
         <p:nvSpPr>
-          <p:cNvPr id="18" name="Rounded Rectangle 17"/>
+          <p:cNvPr id="20" name="Rounded Rectangle 19"/>
           <p:cNvSpPr/>
           <p:nvPr/>
         </p:nvSpPr>
@@ -17591,7 +19210,7 @@
       </p:sp>
       <p:sp>
         <p:nvSpPr>
-          <p:cNvPr id="19" name="Oval 18"/>
+          <p:cNvPr id="21" name="Oval 20"/>
           <p:cNvSpPr/>
           <p:nvPr/>
         </p:nvSpPr>
@@ -17644,7 +19263,7 @@
       </p:sp>
       <p:sp>
         <p:nvSpPr>
-          <p:cNvPr id="20" name="TextBox 19"/>
+          <p:cNvPr id="22" name="TextBox 21"/>
           <p:cNvSpPr txBox="1"/>
           <p:nvPr/>
         </p:nvSpPr>
@@ -17678,7 +19297,7 @@
       </p:sp>
       <p:sp>
         <p:nvSpPr>
-          <p:cNvPr id="21" name="Rounded Rectangle 20"/>
+          <p:cNvPr id="23" name="Rounded Rectangle 22"/>
           <p:cNvSpPr/>
           <p:nvPr/>
         </p:nvSpPr>
@@ -17734,7 +19353,7 @@
       </p:sp>
       <p:sp>
         <p:nvSpPr>
-          <p:cNvPr id="22" name="Oval 21"/>
+          <p:cNvPr id="24" name="Oval 23"/>
           <p:cNvSpPr/>
           <p:nvPr/>
         </p:nvSpPr>
@@ -17787,7 +19406,7 @@
       </p:sp>
       <p:sp>
         <p:nvSpPr>
-          <p:cNvPr id="23" name="TextBox 22"/>
+          <p:cNvPr id="25" name="TextBox 24"/>
           <p:cNvSpPr txBox="1"/>
           <p:nvPr/>
         </p:nvSpPr>
@@ -18202,7 +19821,111 @@
       </p:pic>
       <p:sp>
         <p:nvSpPr>
-          <p:cNvPr id="11" name="TextBox 10"/>
+          <p:cNvPr id="11" name="Rounded Rectangle 10"/>
+          <p:cNvSpPr/>
+          <p:nvPr/>
+        </p:nvSpPr>
+        <p:spPr>
+          <a:xfrm>
+            <a:off x="411479" y="1444752"/>
+            <a:ext cx="11368735" cy="4800600"/>
+          </a:xfrm>
+          <a:prstGeom prst="roundRect">
+            <a:avLst>
+              <a:gd name="adj" fmla="val 4000"/>
+            </a:avLst>
+          </a:prstGeom>
+          <a:solidFill>
+            <a:srgbClr val="FFFFFF">
+              <a:alpha val="84000"/>
+            </a:srgbClr>
+          </a:solidFill>
+          <a:ln w="19050">
+            <a:solidFill>
+              <a:srgbClr val="FFFFFF"/>
+            </a:solidFill>
+          </a:ln>
+          <a:effectLst>
+            <a:outerShdw blurRad="203200" dist="50800" dir="5400000" algn="t" rotWithShape="0">
+              <a:srgbClr val="1A2340">
+                <a:alpha val="20000"/>
+              </a:srgbClr>
+            </a:outerShdw>
+          </a:effectLst>
+        </p:spPr>
+        <p:style>
+          <a:lnRef idx="1">
+            <a:schemeClr val="accent1"/>
+          </a:lnRef>
+          <a:fillRef idx="3">
+            <a:schemeClr val="accent1"/>
+          </a:fillRef>
+          <a:effectRef idx="2">
+            <a:schemeClr val="accent1"/>
+          </a:effectRef>
+          <a:fontRef idx="minor">
+            <a:schemeClr val="lt1"/>
+          </a:fontRef>
+        </p:style>
+        <p:txBody>
+          <a:bodyPr rtlCol="0" anchor="ctr"/>
+          <a:lstStyle/>
+          <a:p>
+            <a:pPr algn="ctr"/>
+          </a:p>
+        </p:txBody>
+      </p:sp>
+      <p:sp>
+        <p:nvSpPr>
+          <p:cNvPr id="12" name="Rounded Rectangle 11"/>
+          <p:cNvSpPr/>
+          <p:nvPr/>
+        </p:nvSpPr>
+        <p:spPr>
+          <a:xfrm>
+            <a:off x="731519" y="1508760"/>
+            <a:ext cx="10728655" cy="32004"/>
+          </a:xfrm>
+          <a:prstGeom prst="roundRect">
+            <a:avLst>
+              <a:gd name="adj" fmla="val 50000"/>
+            </a:avLst>
+          </a:prstGeom>
+          <a:solidFill>
+            <a:srgbClr val="FFFFFF">
+              <a:alpha val="85000"/>
+            </a:srgbClr>
+          </a:solidFill>
+          <a:ln>
+            <a:noFill/>
+          </a:ln>
+          <a:effectLst/>
+        </p:spPr>
+        <p:style>
+          <a:lnRef idx="1">
+            <a:schemeClr val="accent1"/>
+          </a:lnRef>
+          <a:fillRef idx="3">
+            <a:schemeClr val="accent1"/>
+          </a:fillRef>
+          <a:effectRef idx="2">
+            <a:schemeClr val="accent1"/>
+          </a:effectRef>
+          <a:fontRef idx="minor">
+            <a:schemeClr val="lt1"/>
+          </a:fontRef>
+        </p:style>
+        <p:txBody>
+          <a:bodyPr rtlCol="0" anchor="ctr"/>
+          <a:lstStyle/>
+          <a:p>
+            <a:pPr algn="ctr"/>
+          </a:p>
+        </p:txBody>
+      </p:sp>
+      <p:sp>
+        <p:nvSpPr>
+          <p:cNvPr id="13" name="TextBox 12"/>
           <p:cNvSpPr txBox="1"/>
           <p:nvPr/>
         </p:nvSpPr>
@@ -18236,7 +19959,7 @@
       </p:sp>
       <p:sp>
         <p:nvSpPr>
-          <p:cNvPr id="12" name="Rounded Rectangle 11"/>
+          <p:cNvPr id="14" name="Rounded Rectangle 13"/>
           <p:cNvSpPr/>
           <p:nvPr/>
         </p:nvSpPr>
@@ -18292,7 +20015,7 @@
       </p:sp>
       <p:sp>
         <p:nvSpPr>
-          <p:cNvPr id="13" name="Oval 12"/>
+          <p:cNvPr id="15" name="Oval 14"/>
           <p:cNvSpPr/>
           <p:nvPr/>
         </p:nvSpPr>
@@ -18345,7 +20068,7 @@
       </p:sp>
       <p:sp>
         <p:nvSpPr>
-          <p:cNvPr id="14" name="TextBox 13"/>
+          <p:cNvPr id="16" name="TextBox 15"/>
           <p:cNvSpPr txBox="1"/>
           <p:nvPr/>
         </p:nvSpPr>
@@ -18379,7 +20102,7 @@
       </p:sp>
       <p:sp>
         <p:nvSpPr>
-          <p:cNvPr id="15" name="Rounded Rectangle 14"/>
+          <p:cNvPr id="17" name="Rounded Rectangle 16"/>
           <p:cNvSpPr/>
           <p:nvPr/>
         </p:nvSpPr>
@@ -18438,7 +20161,7 @@
       </p:sp>
       <p:sp>
         <p:nvSpPr>
-          <p:cNvPr id="16" name="Oval 15"/>
+          <p:cNvPr id="18" name="Oval 17"/>
           <p:cNvSpPr/>
           <p:nvPr/>
         </p:nvSpPr>
@@ -18491,7 +20214,7 @@
       </p:sp>
       <p:sp>
         <p:nvSpPr>
-          <p:cNvPr id="17" name="TextBox 16"/>
+          <p:cNvPr id="19" name="TextBox 18"/>
           <p:cNvSpPr txBox="1"/>
           <p:nvPr/>
         </p:nvSpPr>
@@ -18525,7 +20248,7 @@
       </p:sp>
       <p:sp>
         <p:nvSpPr>
-          <p:cNvPr id="18" name="Rounded Rectangle 17"/>
+          <p:cNvPr id="20" name="Rounded Rectangle 19"/>
           <p:cNvSpPr/>
           <p:nvPr/>
         </p:nvSpPr>
@@ -18581,7 +20304,7 @@
       </p:sp>
       <p:sp>
         <p:nvSpPr>
-          <p:cNvPr id="19" name="Oval 18"/>
+          <p:cNvPr id="21" name="Oval 20"/>
           <p:cNvSpPr/>
           <p:nvPr/>
         </p:nvSpPr>
@@ -18634,7 +20357,7 @@
       </p:sp>
       <p:sp>
         <p:nvSpPr>
-          <p:cNvPr id="20" name="TextBox 19"/>
+          <p:cNvPr id="22" name="TextBox 21"/>
           <p:cNvSpPr txBox="1"/>
           <p:nvPr/>
         </p:nvSpPr>
@@ -18668,7 +20391,7 @@
       </p:sp>
       <p:sp>
         <p:nvSpPr>
-          <p:cNvPr id="21" name="Rounded Rectangle 20"/>
+          <p:cNvPr id="23" name="Rounded Rectangle 22"/>
           <p:cNvSpPr/>
           <p:nvPr/>
         </p:nvSpPr>
@@ -18724,7 +20447,7 @@
       </p:sp>
       <p:sp>
         <p:nvSpPr>
-          <p:cNvPr id="22" name="Oval 21"/>
+          <p:cNvPr id="24" name="Oval 23"/>
           <p:cNvSpPr/>
           <p:nvPr/>
         </p:nvSpPr>
@@ -18777,7 +20500,7 @@
       </p:sp>
       <p:sp>
         <p:nvSpPr>
-          <p:cNvPr id="23" name="TextBox 22"/>
+          <p:cNvPr id="25" name="TextBox 24"/>
           <p:cNvSpPr txBox="1"/>
           <p:nvPr/>
         </p:nvSpPr>
@@ -18811,7 +20534,7 @@
       </p:sp>
       <p:sp>
         <p:nvSpPr>
-          <p:cNvPr id="24" name="TextBox 23"/>
+          <p:cNvPr id="26" name="TextBox 25"/>
           <p:cNvSpPr txBox="1"/>
           <p:nvPr/>
         </p:nvSpPr>
@@ -19923,7 +21646,111 @@
       </p:pic>
       <p:sp>
         <p:nvSpPr>
-          <p:cNvPr id="11" name="Oval 10"/>
+          <p:cNvPr id="11" name="Rounded Rectangle 10"/>
+          <p:cNvSpPr/>
+          <p:nvPr/>
+        </p:nvSpPr>
+        <p:spPr>
+          <a:xfrm>
+            <a:off x="411479" y="1444752"/>
+            <a:ext cx="11368735" cy="4800600"/>
+          </a:xfrm>
+          <a:prstGeom prst="roundRect">
+            <a:avLst>
+              <a:gd name="adj" fmla="val 4000"/>
+            </a:avLst>
+          </a:prstGeom>
+          <a:solidFill>
+            <a:srgbClr val="FFFFFF">
+              <a:alpha val="84000"/>
+            </a:srgbClr>
+          </a:solidFill>
+          <a:ln w="19050">
+            <a:solidFill>
+              <a:srgbClr val="FFFFFF"/>
+            </a:solidFill>
+          </a:ln>
+          <a:effectLst>
+            <a:outerShdw blurRad="203200" dist="50800" dir="5400000" algn="t" rotWithShape="0">
+              <a:srgbClr val="1A2340">
+                <a:alpha val="20000"/>
+              </a:srgbClr>
+            </a:outerShdw>
+          </a:effectLst>
+        </p:spPr>
+        <p:style>
+          <a:lnRef idx="1">
+            <a:schemeClr val="accent1"/>
+          </a:lnRef>
+          <a:fillRef idx="3">
+            <a:schemeClr val="accent1"/>
+          </a:fillRef>
+          <a:effectRef idx="2">
+            <a:schemeClr val="accent1"/>
+          </a:effectRef>
+          <a:fontRef idx="minor">
+            <a:schemeClr val="lt1"/>
+          </a:fontRef>
+        </p:style>
+        <p:txBody>
+          <a:bodyPr rtlCol="0" anchor="ctr"/>
+          <a:lstStyle/>
+          <a:p>
+            <a:pPr algn="ctr"/>
+          </a:p>
+        </p:txBody>
+      </p:sp>
+      <p:sp>
+        <p:nvSpPr>
+          <p:cNvPr id="12" name="Rounded Rectangle 11"/>
+          <p:cNvSpPr/>
+          <p:nvPr/>
+        </p:nvSpPr>
+        <p:spPr>
+          <a:xfrm>
+            <a:off x="731519" y="1508760"/>
+            <a:ext cx="10728655" cy="32004"/>
+          </a:xfrm>
+          <a:prstGeom prst="roundRect">
+            <a:avLst>
+              <a:gd name="adj" fmla="val 50000"/>
+            </a:avLst>
+          </a:prstGeom>
+          <a:solidFill>
+            <a:srgbClr val="FFFFFF">
+              <a:alpha val="85000"/>
+            </a:srgbClr>
+          </a:solidFill>
+          <a:ln>
+            <a:noFill/>
+          </a:ln>
+          <a:effectLst/>
+        </p:spPr>
+        <p:style>
+          <a:lnRef idx="1">
+            <a:schemeClr val="accent1"/>
+          </a:lnRef>
+          <a:fillRef idx="3">
+            <a:schemeClr val="accent1"/>
+          </a:fillRef>
+          <a:effectRef idx="2">
+            <a:schemeClr val="accent1"/>
+          </a:effectRef>
+          <a:fontRef idx="minor">
+            <a:schemeClr val="lt1"/>
+          </a:fontRef>
+        </p:style>
+        <p:txBody>
+          <a:bodyPr rtlCol="0" anchor="ctr"/>
+          <a:lstStyle/>
+          <a:p>
+            <a:pPr algn="ctr"/>
+          </a:p>
+        </p:txBody>
+      </p:sp>
+      <p:sp>
+        <p:nvSpPr>
+          <p:cNvPr id="13" name="Oval 12"/>
           <p:cNvSpPr/>
           <p:nvPr/>
         </p:nvSpPr>
@@ -19976,7 +21803,7 @@
       </p:sp>
       <p:sp>
         <p:nvSpPr>
-          <p:cNvPr id="12" name="TextBox 11"/>
+          <p:cNvPr id="14" name="TextBox 13"/>
           <p:cNvSpPr txBox="1"/>
           <p:nvPr/>
         </p:nvSpPr>
@@ -20010,7 +21837,7 @@
       </p:sp>
       <p:sp>
         <p:nvSpPr>
-          <p:cNvPr id="13" name="Oval 12"/>
+          <p:cNvPr id="15" name="Oval 14"/>
           <p:cNvSpPr/>
           <p:nvPr/>
         </p:nvSpPr>
@@ -20063,7 +21890,7 @@
       </p:sp>
       <p:sp>
         <p:nvSpPr>
-          <p:cNvPr id="14" name="TextBox 13"/>
+          <p:cNvPr id="16" name="TextBox 15"/>
           <p:cNvSpPr txBox="1"/>
           <p:nvPr/>
         </p:nvSpPr>
@@ -20097,7 +21924,7 @@
       </p:sp>
       <p:sp>
         <p:nvSpPr>
-          <p:cNvPr id="15" name="Oval 14"/>
+          <p:cNvPr id="17" name="Oval 16"/>
           <p:cNvSpPr/>
           <p:nvPr/>
         </p:nvSpPr>
@@ -20150,7 +21977,7 @@
       </p:sp>
       <p:sp>
         <p:nvSpPr>
-          <p:cNvPr id="16" name="TextBox 15"/>
+          <p:cNvPr id="18" name="TextBox 17"/>
           <p:cNvSpPr txBox="1"/>
           <p:nvPr/>
         </p:nvSpPr>
@@ -20184,7 +22011,7 @@
       </p:sp>
       <p:sp>
         <p:nvSpPr>
-          <p:cNvPr id="17" name="Oval 16"/>
+          <p:cNvPr id="19" name="Oval 18"/>
           <p:cNvSpPr/>
           <p:nvPr/>
         </p:nvSpPr>
@@ -20237,7 +22064,7 @@
       </p:sp>
       <p:sp>
         <p:nvSpPr>
-          <p:cNvPr id="18" name="TextBox 17"/>
+          <p:cNvPr id="20" name="TextBox 19"/>
           <p:cNvSpPr txBox="1"/>
           <p:nvPr/>
         </p:nvSpPr>
@@ -20271,7 +22098,7 @@
       </p:sp>
       <p:sp>
         <p:nvSpPr>
-          <p:cNvPr id="19" name="Oval 18"/>
+          <p:cNvPr id="21" name="Oval 20"/>
           <p:cNvSpPr/>
           <p:nvPr/>
         </p:nvSpPr>
@@ -20324,7 +22151,7 @@
       </p:sp>
       <p:sp>
         <p:nvSpPr>
-          <p:cNvPr id="20" name="TextBox 19"/>
+          <p:cNvPr id="22" name="TextBox 21"/>
           <p:cNvSpPr txBox="1"/>
           <p:nvPr/>
         </p:nvSpPr>
@@ -20358,7 +22185,7 @@
       </p:sp>
       <p:sp>
         <p:nvSpPr>
-          <p:cNvPr id="21" name="Oval 20"/>
+          <p:cNvPr id="23" name="Oval 22"/>
           <p:cNvSpPr/>
           <p:nvPr/>
         </p:nvSpPr>
@@ -20411,7 +22238,7 @@
       </p:sp>
       <p:sp>
         <p:nvSpPr>
-          <p:cNvPr id="22" name="TextBox 21"/>
+          <p:cNvPr id="24" name="TextBox 23"/>
           <p:cNvSpPr txBox="1"/>
           <p:nvPr/>
         </p:nvSpPr>
@@ -20445,7 +22272,7 @@
       </p:sp>
       <p:sp>
         <p:nvSpPr>
-          <p:cNvPr id="23" name="Oval 22"/>
+          <p:cNvPr id="25" name="Oval 24"/>
           <p:cNvSpPr/>
           <p:nvPr/>
         </p:nvSpPr>
@@ -20498,7 +22325,7 @@
       </p:sp>
       <p:sp>
         <p:nvSpPr>
-          <p:cNvPr id="24" name="TextBox 23"/>
+          <p:cNvPr id="26" name="TextBox 25"/>
           <p:cNvSpPr txBox="1"/>
           <p:nvPr/>
         </p:nvSpPr>
@@ -20532,7 +22359,7 @@
       </p:sp>
       <p:sp>
         <p:nvSpPr>
-          <p:cNvPr id="25" name="Oval 24"/>
+          <p:cNvPr id="27" name="Oval 26"/>
           <p:cNvSpPr/>
           <p:nvPr/>
         </p:nvSpPr>
@@ -20585,7 +22412,7 @@
       </p:sp>
       <p:sp>
         <p:nvSpPr>
-          <p:cNvPr id="26" name="TextBox 25"/>
+          <p:cNvPr id="28" name="TextBox 27"/>
           <p:cNvSpPr txBox="1"/>
           <p:nvPr/>
         </p:nvSpPr>
@@ -21000,14 +22827,177 @@
       </p:pic>
       <p:sp>
         <p:nvSpPr>
-          <p:cNvPr id="11" name="TextBox 10"/>
+          <p:cNvPr id="11" name="Rounded Rectangle 10"/>
+          <p:cNvSpPr/>
+          <p:nvPr/>
+        </p:nvSpPr>
+        <p:spPr>
+          <a:xfrm>
+            <a:off x="411479" y="1444752"/>
+            <a:ext cx="11368735" cy="4800600"/>
+          </a:xfrm>
+          <a:prstGeom prst="roundRect">
+            <a:avLst>
+              <a:gd name="adj" fmla="val 4000"/>
+            </a:avLst>
+          </a:prstGeom>
+          <a:solidFill>
+            <a:srgbClr val="FFFFFF">
+              <a:alpha val="84000"/>
+            </a:srgbClr>
+          </a:solidFill>
+          <a:ln w="19050">
+            <a:solidFill>
+              <a:srgbClr val="FFFFFF"/>
+            </a:solidFill>
+          </a:ln>
+          <a:effectLst>
+            <a:outerShdw blurRad="203200" dist="50800" dir="5400000" algn="t" rotWithShape="0">
+              <a:srgbClr val="1A2340">
+                <a:alpha val="20000"/>
+              </a:srgbClr>
+            </a:outerShdw>
+          </a:effectLst>
+        </p:spPr>
+        <p:style>
+          <a:lnRef idx="1">
+            <a:schemeClr val="accent1"/>
+          </a:lnRef>
+          <a:fillRef idx="3">
+            <a:schemeClr val="accent1"/>
+          </a:fillRef>
+          <a:effectRef idx="2">
+            <a:schemeClr val="accent1"/>
+          </a:effectRef>
+          <a:fontRef idx="minor">
+            <a:schemeClr val="lt1"/>
+          </a:fontRef>
+        </p:style>
+        <p:txBody>
+          <a:bodyPr rtlCol="0" anchor="ctr"/>
+          <a:lstStyle/>
+          <a:p>
+            <a:pPr algn="ctr"/>
+          </a:p>
+        </p:txBody>
+      </p:sp>
+      <p:sp>
+        <p:nvSpPr>
+          <p:cNvPr id="12" name="Rounded Rectangle 11"/>
+          <p:cNvSpPr/>
+          <p:nvPr/>
+        </p:nvSpPr>
+        <p:spPr>
+          <a:xfrm>
+            <a:off x="731519" y="1508760"/>
+            <a:ext cx="10728655" cy="32004"/>
+          </a:xfrm>
+          <a:prstGeom prst="roundRect">
+            <a:avLst>
+              <a:gd name="adj" fmla="val 50000"/>
+            </a:avLst>
+          </a:prstGeom>
+          <a:solidFill>
+            <a:srgbClr val="FFFFFF">
+              <a:alpha val="85000"/>
+            </a:srgbClr>
+          </a:solidFill>
+          <a:ln>
+            <a:noFill/>
+          </a:ln>
+          <a:effectLst/>
+        </p:spPr>
+        <p:style>
+          <a:lnRef idx="1">
+            <a:schemeClr val="accent1"/>
+          </a:lnRef>
+          <a:fillRef idx="3">
+            <a:schemeClr val="accent1"/>
+          </a:fillRef>
+          <a:effectRef idx="2">
+            <a:schemeClr val="accent1"/>
+          </a:effectRef>
+          <a:fontRef idx="minor">
+            <a:schemeClr val="lt1"/>
+          </a:fontRef>
+        </p:style>
+        <p:txBody>
+          <a:bodyPr rtlCol="0" anchor="ctr"/>
+          <a:lstStyle/>
+          <a:p>
+            <a:pPr algn="ctr"/>
+          </a:p>
+        </p:txBody>
+      </p:sp>
+      <p:sp>
+        <p:nvSpPr>
+          <p:cNvPr id="13" name="Rounded Rectangle 12"/>
+          <p:cNvSpPr/>
+          <p:nvPr/>
+        </p:nvSpPr>
+        <p:spPr>
+          <a:xfrm>
+            <a:off x="548640" y="1591056"/>
+            <a:ext cx="64008" cy="315468"/>
+          </a:xfrm>
+          <a:prstGeom prst="roundRect">
+            <a:avLst>
+              <a:gd name="adj" fmla="val 50000"/>
+            </a:avLst>
+          </a:prstGeom>
+          <a:solidFill>
+            <a:srgbClr val="8D6A2A"/>
+          </a:solidFill>
+          <a:ln>
+            <a:noFill/>
+          </a:ln>
+          <a:effectLst>
+            <a:outerShdw blurRad="203200" dist="50800" dir="5400000" algn="t" rotWithShape="0">
+              <a:srgbClr val="1A2340">
+                <a:alpha val="20000"/>
+              </a:srgbClr>
+            </a:outerShdw>
+          </a:effectLst>
+          <a:scene3d>
+            <a:camera prst="orthographicFront"/>
+            <a:lightRig rig="threePt" dir="t"/>
+          </a:scene3d>
+          <a:sp3d>
+            <a:bevelT w="44450" h="25400" prst="softRound"/>
+          </a:sp3d>
+        </p:spPr>
+        <p:style>
+          <a:lnRef idx="1">
+            <a:schemeClr val="accent1"/>
+          </a:lnRef>
+          <a:fillRef idx="3">
+            <a:schemeClr val="accent1"/>
+          </a:fillRef>
+          <a:effectRef idx="2">
+            <a:schemeClr val="accent1"/>
+          </a:effectRef>
+          <a:fontRef idx="minor">
+            <a:schemeClr val="lt1"/>
+          </a:fontRef>
+        </p:style>
+        <p:txBody>
+          <a:bodyPr rtlCol="0" anchor="ctr"/>
+          <a:lstStyle/>
+          <a:p>
+            <a:pPr algn="ctr"/>
+          </a:p>
+        </p:txBody>
+      </p:sp>
+      <p:sp>
+        <p:nvSpPr>
+          <p:cNvPr id="14" name="TextBox 13"/>
           <p:cNvSpPr txBox="1"/>
           <p:nvPr/>
         </p:nvSpPr>
         <p:spPr>
           <a:xfrm>
-            <a:off x="548640" y="1554480"/>
-            <a:ext cx="11094415" cy="498348"/>
+            <a:off x="777240" y="1554480"/>
+            <a:ext cx="10865815" cy="498348"/>
           </a:xfrm>
           <a:prstGeom prst="rect">
             <a:avLst/>
@@ -21039,7 +23029,7 @@
       </p:sp>
       <p:sp>
         <p:nvSpPr>
-          <p:cNvPr id="12" name="Oval 11"/>
+          <p:cNvPr id="15" name="Oval 14"/>
           <p:cNvSpPr/>
           <p:nvPr/>
         </p:nvSpPr>
@@ -21092,7 +23082,7 @@
       </p:sp>
       <p:sp>
         <p:nvSpPr>
-          <p:cNvPr id="13" name="TextBox 12"/>
+          <p:cNvPr id="16" name="TextBox 15"/>
           <p:cNvSpPr txBox="1"/>
           <p:nvPr/>
         </p:nvSpPr>
@@ -21135,7 +23125,7 @@
       </p:sp>
       <p:sp>
         <p:nvSpPr>
-          <p:cNvPr id="14" name="Oval 13"/>
+          <p:cNvPr id="17" name="Oval 16"/>
           <p:cNvSpPr/>
           <p:nvPr/>
         </p:nvSpPr>
@@ -21188,7 +23178,7 @@
       </p:sp>
       <p:sp>
         <p:nvSpPr>
-          <p:cNvPr id="15" name="TextBox 14"/>
+          <p:cNvPr id="18" name="TextBox 17"/>
           <p:cNvSpPr txBox="1"/>
           <p:nvPr/>
         </p:nvSpPr>
@@ -21610,9 +23600,167 @@
           </a:prstGeom>
         </p:spPr>
       </p:pic>
+      <p:sp>
+        <p:nvSpPr>
+          <p:cNvPr id="11" name="Rounded Rectangle 10"/>
+          <p:cNvSpPr/>
+          <p:nvPr/>
+        </p:nvSpPr>
+        <p:spPr>
+          <a:xfrm>
+            <a:off x="411479" y="1444752"/>
+            <a:ext cx="11368735" cy="4800600"/>
+          </a:xfrm>
+          <a:prstGeom prst="roundRect">
+            <a:avLst>
+              <a:gd name="adj" fmla="val 4000"/>
+            </a:avLst>
+          </a:prstGeom>
+          <a:solidFill>
+            <a:srgbClr val="FFFFFF">
+              <a:alpha val="84000"/>
+            </a:srgbClr>
+          </a:solidFill>
+          <a:ln w="19050">
+            <a:solidFill>
+              <a:srgbClr val="FFFFFF"/>
+            </a:solidFill>
+          </a:ln>
+          <a:effectLst>
+            <a:outerShdw blurRad="203200" dist="50800" dir="5400000" algn="t" rotWithShape="0">
+              <a:srgbClr val="1A2340">
+                <a:alpha val="20000"/>
+              </a:srgbClr>
+            </a:outerShdw>
+          </a:effectLst>
+        </p:spPr>
+        <p:style>
+          <a:lnRef idx="1">
+            <a:schemeClr val="accent1"/>
+          </a:lnRef>
+          <a:fillRef idx="3">
+            <a:schemeClr val="accent1"/>
+          </a:fillRef>
+          <a:effectRef idx="2">
+            <a:schemeClr val="accent1"/>
+          </a:effectRef>
+          <a:fontRef idx="minor">
+            <a:schemeClr val="lt1"/>
+          </a:fontRef>
+        </p:style>
+        <p:txBody>
+          <a:bodyPr rtlCol="0" anchor="ctr"/>
+          <a:lstStyle/>
+          <a:p>
+            <a:pPr algn="ctr"/>
+          </a:p>
+        </p:txBody>
+      </p:sp>
+      <p:sp>
+        <p:nvSpPr>
+          <p:cNvPr id="12" name="Rounded Rectangle 11"/>
+          <p:cNvSpPr/>
+          <p:nvPr/>
+        </p:nvSpPr>
+        <p:spPr>
+          <a:xfrm>
+            <a:off x="731519" y="1508760"/>
+            <a:ext cx="10728655" cy="32004"/>
+          </a:xfrm>
+          <a:prstGeom prst="roundRect">
+            <a:avLst>
+              <a:gd name="adj" fmla="val 50000"/>
+            </a:avLst>
+          </a:prstGeom>
+          <a:solidFill>
+            <a:srgbClr val="FFFFFF">
+              <a:alpha val="85000"/>
+            </a:srgbClr>
+          </a:solidFill>
+          <a:ln>
+            <a:noFill/>
+          </a:ln>
+          <a:effectLst/>
+        </p:spPr>
+        <p:style>
+          <a:lnRef idx="1">
+            <a:schemeClr val="accent1"/>
+          </a:lnRef>
+          <a:fillRef idx="3">
+            <a:schemeClr val="accent1"/>
+          </a:fillRef>
+          <a:effectRef idx="2">
+            <a:schemeClr val="accent1"/>
+          </a:effectRef>
+          <a:fontRef idx="minor">
+            <a:schemeClr val="lt1"/>
+          </a:fontRef>
+        </p:style>
+        <p:txBody>
+          <a:bodyPr rtlCol="0" anchor="ctr"/>
+          <a:lstStyle/>
+          <a:p>
+            <a:pPr algn="ctr"/>
+          </a:p>
+        </p:txBody>
+      </p:sp>
+      <p:sp>
+        <p:nvSpPr>
+          <p:cNvPr id="13" name="Rounded Rectangle 12"/>
+          <p:cNvSpPr/>
+          <p:nvPr/>
+        </p:nvSpPr>
+        <p:spPr>
+          <a:xfrm>
+            <a:off x="548640" y="1554480"/>
+            <a:ext cx="11094415" cy="4617720"/>
+          </a:xfrm>
+          <a:prstGeom prst="roundRect">
+            <a:avLst>
+              <a:gd name="adj" fmla="val 3000"/>
+            </a:avLst>
+          </a:prstGeom>
+          <a:solidFill>
+            <a:srgbClr val="FFFFFF"/>
+          </a:solidFill>
+          <a:ln w="9525">
+            <a:solidFill>
+              <a:srgbClr val="DDDFEE"/>
+            </a:solidFill>
+          </a:ln>
+          <a:effectLst>
+            <a:outerShdw blurRad="203200" dist="50800" dir="5400000" algn="t" rotWithShape="0">
+              <a:srgbClr val="1A2340">
+                <a:alpha val="20000"/>
+              </a:srgbClr>
+            </a:outerShdw>
+          </a:effectLst>
+        </p:spPr>
+        <p:style>
+          <a:lnRef idx="1">
+            <a:schemeClr val="accent1"/>
+          </a:lnRef>
+          <a:fillRef idx="3">
+            <a:schemeClr val="accent1"/>
+          </a:fillRef>
+          <a:effectRef idx="2">
+            <a:schemeClr val="accent1"/>
+          </a:effectRef>
+          <a:fontRef idx="minor">
+            <a:schemeClr val="lt1"/>
+          </a:fontRef>
+        </p:style>
+        <p:txBody>
+          <a:bodyPr rtlCol="0" anchor="ctr"/>
+          <a:lstStyle/>
+          <a:p>
+            <a:pPr algn="ctr"/>
+          </a:p>
+        </p:txBody>
+      </p:sp>
       <p:pic>
         <p:nvPicPr>
-          <p:cNvPr id="11" name="Picture 10" descr="A vertical chain: brain and brainstem, spinal cord, neuromuscular junction and muscle fibre, each linked to the drugs acting there: antispasmodics, antispastics, neuromuscular blockers and dantrolene."/>
+          <p:cNvPr id="14" name="Picture 13" descr="A vertical chain: brain and brainstem, spinal cord, neuromuscular junction and muscle fibre, each linked to the drugs acting there: antispasmodics, antispastics, neuromuscular blockers and dantrolene."/>
           <p:cNvPicPr>
             <a:picLocks noChangeAspect="1"/>
           </p:cNvPicPr>
@@ -21626,8 +23774,8 @@
         </p:blipFill>
         <p:spPr>
           <a:xfrm>
-            <a:off x="1842757" y="1554480"/>
-            <a:ext cx="8506180" cy="4160520"/>
+            <a:off x="2029708" y="1664207"/>
+            <a:ext cx="8132279" cy="3977639"/>
           </a:xfrm>
           <a:prstGeom prst="rect">
             <a:avLst/>
@@ -21636,14 +23784,14 @@
       </p:pic>
       <p:sp>
         <p:nvSpPr>
-          <p:cNvPr id="12" name="TextBox 11"/>
+          <p:cNvPr id="15" name="TextBox 14"/>
           <p:cNvSpPr txBox="1"/>
           <p:nvPr/>
         </p:nvSpPr>
         <p:spPr>
           <a:xfrm>
-            <a:off x="548640" y="5806440"/>
-            <a:ext cx="11094415" cy="365760"/>
+            <a:off x="685800" y="5733287"/>
+            <a:ext cx="10820095" cy="365760"/>
           </a:xfrm>
           <a:prstGeom prst="rect">
             <a:avLst/>
@@ -22052,7 +24200,111 @@
       </p:pic>
       <p:sp>
         <p:nvSpPr>
-          <p:cNvPr id="11" name="Oval 10"/>
+          <p:cNvPr id="11" name="Rounded Rectangle 10"/>
+          <p:cNvSpPr/>
+          <p:nvPr/>
+        </p:nvSpPr>
+        <p:spPr>
+          <a:xfrm>
+            <a:off x="411479" y="1444752"/>
+            <a:ext cx="11368735" cy="4800600"/>
+          </a:xfrm>
+          <a:prstGeom prst="roundRect">
+            <a:avLst>
+              <a:gd name="adj" fmla="val 4000"/>
+            </a:avLst>
+          </a:prstGeom>
+          <a:solidFill>
+            <a:srgbClr val="FFFFFF">
+              <a:alpha val="84000"/>
+            </a:srgbClr>
+          </a:solidFill>
+          <a:ln w="19050">
+            <a:solidFill>
+              <a:srgbClr val="FFFFFF"/>
+            </a:solidFill>
+          </a:ln>
+          <a:effectLst>
+            <a:outerShdw blurRad="203200" dist="50800" dir="5400000" algn="t" rotWithShape="0">
+              <a:srgbClr val="1A2340">
+                <a:alpha val="20000"/>
+              </a:srgbClr>
+            </a:outerShdw>
+          </a:effectLst>
+        </p:spPr>
+        <p:style>
+          <a:lnRef idx="1">
+            <a:schemeClr val="accent1"/>
+          </a:lnRef>
+          <a:fillRef idx="3">
+            <a:schemeClr val="accent1"/>
+          </a:fillRef>
+          <a:effectRef idx="2">
+            <a:schemeClr val="accent1"/>
+          </a:effectRef>
+          <a:fontRef idx="minor">
+            <a:schemeClr val="lt1"/>
+          </a:fontRef>
+        </p:style>
+        <p:txBody>
+          <a:bodyPr rtlCol="0" anchor="ctr"/>
+          <a:lstStyle/>
+          <a:p>
+            <a:pPr algn="ctr"/>
+          </a:p>
+        </p:txBody>
+      </p:sp>
+      <p:sp>
+        <p:nvSpPr>
+          <p:cNvPr id="12" name="Rounded Rectangle 11"/>
+          <p:cNvSpPr/>
+          <p:nvPr/>
+        </p:nvSpPr>
+        <p:spPr>
+          <a:xfrm>
+            <a:off x="731519" y="1508760"/>
+            <a:ext cx="10728655" cy="32004"/>
+          </a:xfrm>
+          <a:prstGeom prst="roundRect">
+            <a:avLst>
+              <a:gd name="adj" fmla="val 50000"/>
+            </a:avLst>
+          </a:prstGeom>
+          <a:solidFill>
+            <a:srgbClr val="FFFFFF">
+              <a:alpha val="85000"/>
+            </a:srgbClr>
+          </a:solidFill>
+          <a:ln>
+            <a:noFill/>
+          </a:ln>
+          <a:effectLst/>
+        </p:spPr>
+        <p:style>
+          <a:lnRef idx="1">
+            <a:schemeClr val="accent1"/>
+          </a:lnRef>
+          <a:fillRef idx="3">
+            <a:schemeClr val="accent1"/>
+          </a:fillRef>
+          <a:effectRef idx="2">
+            <a:schemeClr val="accent1"/>
+          </a:effectRef>
+          <a:fontRef idx="minor">
+            <a:schemeClr val="lt1"/>
+          </a:fontRef>
+        </p:style>
+        <p:txBody>
+          <a:bodyPr rtlCol="0" anchor="ctr"/>
+          <a:lstStyle/>
+          <a:p>
+            <a:pPr algn="ctr"/>
+          </a:p>
+        </p:txBody>
+      </p:sp>
+      <p:sp>
+        <p:nvSpPr>
+          <p:cNvPr id="13" name="Oval 12"/>
           <p:cNvSpPr/>
           <p:nvPr/>
         </p:nvSpPr>
@@ -22105,7 +24357,7 @@
       </p:sp>
       <p:sp>
         <p:nvSpPr>
-          <p:cNvPr id="12" name="TextBox 11"/>
+          <p:cNvPr id="14" name="TextBox 13"/>
           <p:cNvSpPr txBox="1"/>
           <p:nvPr/>
         </p:nvSpPr>
@@ -22139,7 +24391,7 @@
       </p:sp>
       <p:sp>
         <p:nvSpPr>
-          <p:cNvPr id="13" name="Oval 12"/>
+          <p:cNvPr id="15" name="Oval 14"/>
           <p:cNvSpPr/>
           <p:nvPr/>
         </p:nvSpPr>
@@ -22192,7 +24444,7 @@
       </p:sp>
       <p:sp>
         <p:nvSpPr>
-          <p:cNvPr id="14" name="TextBox 13"/>
+          <p:cNvPr id="16" name="TextBox 15"/>
           <p:cNvSpPr txBox="1"/>
           <p:nvPr/>
         </p:nvSpPr>
@@ -22613,6 +24865,110 @@
         </p:nvSpPr>
         <p:spPr>
           <a:xfrm>
+            <a:off x="411479" y="1444752"/>
+            <a:ext cx="11368735" cy="4800600"/>
+          </a:xfrm>
+          <a:prstGeom prst="roundRect">
+            <a:avLst>
+              <a:gd name="adj" fmla="val 4000"/>
+            </a:avLst>
+          </a:prstGeom>
+          <a:solidFill>
+            <a:srgbClr val="FFFFFF">
+              <a:alpha val="84000"/>
+            </a:srgbClr>
+          </a:solidFill>
+          <a:ln w="19050">
+            <a:solidFill>
+              <a:srgbClr val="FFFFFF"/>
+            </a:solidFill>
+          </a:ln>
+          <a:effectLst>
+            <a:outerShdw blurRad="203200" dist="50800" dir="5400000" algn="t" rotWithShape="0">
+              <a:srgbClr val="1A2340">
+                <a:alpha val="20000"/>
+              </a:srgbClr>
+            </a:outerShdw>
+          </a:effectLst>
+        </p:spPr>
+        <p:style>
+          <a:lnRef idx="1">
+            <a:schemeClr val="accent1"/>
+          </a:lnRef>
+          <a:fillRef idx="3">
+            <a:schemeClr val="accent1"/>
+          </a:fillRef>
+          <a:effectRef idx="2">
+            <a:schemeClr val="accent1"/>
+          </a:effectRef>
+          <a:fontRef idx="minor">
+            <a:schemeClr val="lt1"/>
+          </a:fontRef>
+        </p:style>
+        <p:txBody>
+          <a:bodyPr rtlCol="0" anchor="ctr"/>
+          <a:lstStyle/>
+          <a:p>
+            <a:pPr algn="ctr"/>
+          </a:p>
+        </p:txBody>
+      </p:sp>
+      <p:sp>
+        <p:nvSpPr>
+          <p:cNvPr id="12" name="Rounded Rectangle 11"/>
+          <p:cNvSpPr/>
+          <p:nvPr/>
+        </p:nvSpPr>
+        <p:spPr>
+          <a:xfrm>
+            <a:off x="731519" y="1508760"/>
+            <a:ext cx="10728655" cy="32004"/>
+          </a:xfrm>
+          <a:prstGeom prst="roundRect">
+            <a:avLst>
+              <a:gd name="adj" fmla="val 50000"/>
+            </a:avLst>
+          </a:prstGeom>
+          <a:solidFill>
+            <a:srgbClr val="FFFFFF">
+              <a:alpha val="85000"/>
+            </a:srgbClr>
+          </a:solidFill>
+          <a:ln>
+            <a:noFill/>
+          </a:ln>
+          <a:effectLst/>
+        </p:spPr>
+        <p:style>
+          <a:lnRef idx="1">
+            <a:schemeClr val="accent1"/>
+          </a:lnRef>
+          <a:fillRef idx="3">
+            <a:schemeClr val="accent1"/>
+          </a:fillRef>
+          <a:effectRef idx="2">
+            <a:schemeClr val="accent1"/>
+          </a:effectRef>
+          <a:fontRef idx="minor">
+            <a:schemeClr val="lt1"/>
+          </a:fontRef>
+        </p:style>
+        <p:txBody>
+          <a:bodyPr rtlCol="0" anchor="ctr"/>
+          <a:lstStyle/>
+          <a:p>
+            <a:pPr algn="ctr"/>
+          </a:p>
+        </p:txBody>
+      </p:sp>
+      <p:sp>
+        <p:nvSpPr>
+          <p:cNvPr id="13" name="Rounded Rectangle 12"/>
+          <p:cNvSpPr/>
+          <p:nvPr/>
+        </p:nvSpPr>
+        <p:spPr>
+          <a:xfrm>
             <a:off x="1645919" y="2103120"/>
             <a:ext cx="8899855" cy="2431288"/>
           </a:xfrm>
@@ -22663,7 +25019,7 @@
       </p:sp>
       <p:sp>
         <p:nvSpPr>
-          <p:cNvPr id="12" name="Rounded Rectangle 11"/>
+          <p:cNvPr id="14" name="Rounded Rectangle 13"/>
           <p:cNvSpPr/>
           <p:nvPr/>
         </p:nvSpPr>
@@ -22711,7 +25067,7 @@
       </p:sp>
       <p:sp>
         <p:nvSpPr>
-          <p:cNvPr id="13" name="Rounded Rectangle 12"/>
+          <p:cNvPr id="15" name="Rounded Rectangle 14"/>
           <p:cNvSpPr/>
           <p:nvPr/>
         </p:nvSpPr>
@@ -22779,7 +25135,7 @@
       </p:sp>
       <p:sp>
         <p:nvSpPr>
-          <p:cNvPr id="14" name="TextBox 13"/>
+          <p:cNvPr id="16" name="TextBox 15"/>
           <p:cNvSpPr txBox="1"/>
           <p:nvPr/>
         </p:nvSpPr>
@@ -23197,9 +25553,113 @@
           </a:prstGeom>
         </p:spPr>
       </p:pic>
+      <p:sp>
+        <p:nvSpPr>
+          <p:cNvPr id="11" name="Rounded Rectangle 10"/>
+          <p:cNvSpPr/>
+          <p:nvPr/>
+        </p:nvSpPr>
+        <p:spPr>
+          <a:xfrm>
+            <a:off x="411479" y="1444752"/>
+            <a:ext cx="11368735" cy="4800600"/>
+          </a:xfrm>
+          <a:prstGeom prst="roundRect">
+            <a:avLst>
+              <a:gd name="adj" fmla="val 4000"/>
+            </a:avLst>
+          </a:prstGeom>
+          <a:solidFill>
+            <a:srgbClr val="FFFFFF">
+              <a:alpha val="84000"/>
+            </a:srgbClr>
+          </a:solidFill>
+          <a:ln w="19050">
+            <a:solidFill>
+              <a:srgbClr val="FFFFFF"/>
+            </a:solidFill>
+          </a:ln>
+          <a:effectLst>
+            <a:outerShdw blurRad="203200" dist="50800" dir="5400000" algn="t" rotWithShape="0">
+              <a:srgbClr val="1A2340">
+                <a:alpha val="20000"/>
+              </a:srgbClr>
+            </a:outerShdw>
+          </a:effectLst>
+        </p:spPr>
+        <p:style>
+          <a:lnRef idx="1">
+            <a:schemeClr val="accent1"/>
+          </a:lnRef>
+          <a:fillRef idx="3">
+            <a:schemeClr val="accent1"/>
+          </a:fillRef>
+          <a:effectRef idx="2">
+            <a:schemeClr val="accent1"/>
+          </a:effectRef>
+          <a:fontRef idx="minor">
+            <a:schemeClr val="lt1"/>
+          </a:fontRef>
+        </p:style>
+        <p:txBody>
+          <a:bodyPr rtlCol="0" anchor="ctr"/>
+          <a:lstStyle/>
+          <a:p>
+            <a:pPr algn="ctr"/>
+          </a:p>
+        </p:txBody>
+      </p:sp>
+      <p:sp>
+        <p:nvSpPr>
+          <p:cNvPr id="12" name="Rounded Rectangle 11"/>
+          <p:cNvSpPr/>
+          <p:nvPr/>
+        </p:nvSpPr>
+        <p:spPr>
+          <a:xfrm>
+            <a:off x="731519" y="1508760"/>
+            <a:ext cx="10728655" cy="32004"/>
+          </a:xfrm>
+          <a:prstGeom prst="roundRect">
+            <a:avLst>
+              <a:gd name="adj" fmla="val 50000"/>
+            </a:avLst>
+          </a:prstGeom>
+          <a:solidFill>
+            <a:srgbClr val="FFFFFF">
+              <a:alpha val="85000"/>
+            </a:srgbClr>
+          </a:solidFill>
+          <a:ln>
+            <a:noFill/>
+          </a:ln>
+          <a:effectLst/>
+        </p:spPr>
+        <p:style>
+          <a:lnRef idx="1">
+            <a:schemeClr val="accent1"/>
+          </a:lnRef>
+          <a:fillRef idx="3">
+            <a:schemeClr val="accent1"/>
+          </a:fillRef>
+          <a:effectRef idx="2">
+            <a:schemeClr val="accent1"/>
+          </a:effectRef>
+          <a:fontRef idx="minor">
+            <a:schemeClr val="lt1"/>
+          </a:fontRef>
+        </p:style>
+        <p:txBody>
+          <a:bodyPr rtlCol="0" anchor="ctr"/>
+          <a:lstStyle/>
+          <a:p>
+            <a:pPr algn="ctr"/>
+          </a:p>
+        </p:txBody>
+      </p:sp>
       <p:graphicFrame>
         <p:nvGraphicFramePr>
-          <p:cNvPr id="11" name="Table 10"/>
+          <p:cNvPr id="13" name="Table 12"/>
           <p:cNvGraphicFramePr>
             <a:graphicFrameLocks noGrp="1"/>
           </p:cNvGraphicFramePr>
@@ -23947,14 +26407,177 @@
       </p:pic>
       <p:sp>
         <p:nvSpPr>
-          <p:cNvPr id="11" name="TextBox 10"/>
+          <p:cNvPr id="11" name="Rounded Rectangle 10"/>
+          <p:cNvSpPr/>
+          <p:nvPr/>
+        </p:nvSpPr>
+        <p:spPr>
+          <a:xfrm>
+            <a:off x="411479" y="1444752"/>
+            <a:ext cx="11368735" cy="4800600"/>
+          </a:xfrm>
+          <a:prstGeom prst="roundRect">
+            <a:avLst>
+              <a:gd name="adj" fmla="val 4000"/>
+            </a:avLst>
+          </a:prstGeom>
+          <a:solidFill>
+            <a:srgbClr val="FFFFFF">
+              <a:alpha val="84000"/>
+            </a:srgbClr>
+          </a:solidFill>
+          <a:ln w="19050">
+            <a:solidFill>
+              <a:srgbClr val="FFFFFF"/>
+            </a:solidFill>
+          </a:ln>
+          <a:effectLst>
+            <a:outerShdw blurRad="203200" dist="50800" dir="5400000" algn="t" rotWithShape="0">
+              <a:srgbClr val="1A2340">
+                <a:alpha val="20000"/>
+              </a:srgbClr>
+            </a:outerShdw>
+          </a:effectLst>
+        </p:spPr>
+        <p:style>
+          <a:lnRef idx="1">
+            <a:schemeClr val="accent1"/>
+          </a:lnRef>
+          <a:fillRef idx="3">
+            <a:schemeClr val="accent1"/>
+          </a:fillRef>
+          <a:effectRef idx="2">
+            <a:schemeClr val="accent1"/>
+          </a:effectRef>
+          <a:fontRef idx="minor">
+            <a:schemeClr val="lt1"/>
+          </a:fontRef>
+        </p:style>
+        <p:txBody>
+          <a:bodyPr rtlCol="0" anchor="ctr"/>
+          <a:lstStyle/>
+          <a:p>
+            <a:pPr algn="ctr"/>
+          </a:p>
+        </p:txBody>
+      </p:sp>
+      <p:sp>
+        <p:nvSpPr>
+          <p:cNvPr id="12" name="Rounded Rectangle 11"/>
+          <p:cNvSpPr/>
+          <p:nvPr/>
+        </p:nvSpPr>
+        <p:spPr>
+          <a:xfrm>
+            <a:off x="731519" y="1508760"/>
+            <a:ext cx="10728655" cy="32004"/>
+          </a:xfrm>
+          <a:prstGeom prst="roundRect">
+            <a:avLst>
+              <a:gd name="adj" fmla="val 50000"/>
+            </a:avLst>
+          </a:prstGeom>
+          <a:solidFill>
+            <a:srgbClr val="FFFFFF">
+              <a:alpha val="85000"/>
+            </a:srgbClr>
+          </a:solidFill>
+          <a:ln>
+            <a:noFill/>
+          </a:ln>
+          <a:effectLst/>
+        </p:spPr>
+        <p:style>
+          <a:lnRef idx="1">
+            <a:schemeClr val="accent1"/>
+          </a:lnRef>
+          <a:fillRef idx="3">
+            <a:schemeClr val="accent1"/>
+          </a:fillRef>
+          <a:effectRef idx="2">
+            <a:schemeClr val="accent1"/>
+          </a:effectRef>
+          <a:fontRef idx="minor">
+            <a:schemeClr val="lt1"/>
+          </a:fontRef>
+        </p:style>
+        <p:txBody>
+          <a:bodyPr rtlCol="0" anchor="ctr"/>
+          <a:lstStyle/>
+          <a:p>
+            <a:pPr algn="ctr"/>
+          </a:p>
+        </p:txBody>
+      </p:sp>
+      <p:sp>
+        <p:nvSpPr>
+          <p:cNvPr id="13" name="Rounded Rectangle 12"/>
+          <p:cNvSpPr/>
+          <p:nvPr/>
+        </p:nvSpPr>
+        <p:spPr>
+          <a:xfrm>
+            <a:off x="548640" y="1591056"/>
+            <a:ext cx="64008" cy="3489960"/>
+          </a:xfrm>
+          <a:prstGeom prst="roundRect">
+            <a:avLst>
+              <a:gd name="adj" fmla="val 50000"/>
+            </a:avLst>
+          </a:prstGeom>
+          <a:solidFill>
+            <a:srgbClr val="8D6A2A"/>
+          </a:solidFill>
+          <a:ln>
+            <a:noFill/>
+          </a:ln>
+          <a:effectLst>
+            <a:outerShdw blurRad="203200" dist="50800" dir="5400000" algn="t" rotWithShape="0">
+              <a:srgbClr val="1A2340">
+                <a:alpha val="20000"/>
+              </a:srgbClr>
+            </a:outerShdw>
+          </a:effectLst>
+          <a:scene3d>
+            <a:camera prst="orthographicFront"/>
+            <a:lightRig rig="threePt" dir="t"/>
+          </a:scene3d>
+          <a:sp3d>
+            <a:bevelT w="44450" h="25400" prst="softRound"/>
+          </a:sp3d>
+        </p:spPr>
+        <p:style>
+          <a:lnRef idx="1">
+            <a:schemeClr val="accent1"/>
+          </a:lnRef>
+          <a:fillRef idx="3">
+            <a:schemeClr val="accent1"/>
+          </a:fillRef>
+          <a:effectRef idx="2">
+            <a:schemeClr val="accent1"/>
+          </a:effectRef>
+          <a:fontRef idx="minor">
+            <a:schemeClr val="lt1"/>
+          </a:fontRef>
+        </p:style>
+        <p:txBody>
+          <a:bodyPr rtlCol="0" anchor="ctr"/>
+          <a:lstStyle/>
+          <a:p>
+            <a:pPr algn="ctr"/>
+          </a:p>
+        </p:txBody>
+      </p:sp>
+      <p:sp>
+        <p:nvSpPr>
+          <p:cNvPr id="14" name="TextBox 13"/>
           <p:cNvSpPr txBox="1"/>
           <p:nvPr/>
         </p:nvSpPr>
         <p:spPr>
           <a:xfrm>
-            <a:off x="548640" y="1554480"/>
-            <a:ext cx="4480560" cy="4617720"/>
+            <a:off x="777240" y="1554480"/>
+            <a:ext cx="4251960" cy="4617720"/>
           </a:xfrm>
           <a:prstGeom prst="rect">
             <a:avLst/>
@@ -24072,7 +26695,7 @@
       </p:sp>
       <p:sp>
         <p:nvSpPr>
-          <p:cNvPr id="12" name="Oval 11"/>
+          <p:cNvPr id="15" name="Oval 14"/>
           <p:cNvSpPr/>
           <p:nvPr/>
         </p:nvSpPr>
@@ -24125,7 +26748,7 @@
       </p:sp>
       <p:sp>
         <p:nvSpPr>
-          <p:cNvPr id="13" name="TextBox 12"/>
+          <p:cNvPr id="16" name="TextBox 15"/>
           <p:cNvSpPr txBox="1"/>
           <p:nvPr/>
         </p:nvSpPr>
@@ -24159,7 +26782,7 @@
       </p:sp>
       <p:sp>
         <p:nvSpPr>
-          <p:cNvPr id="14" name="Oval 13"/>
+          <p:cNvPr id="17" name="Oval 16"/>
           <p:cNvSpPr/>
           <p:nvPr/>
         </p:nvSpPr>
@@ -24212,7 +26835,7 @@
       </p:sp>
       <p:sp>
         <p:nvSpPr>
-          <p:cNvPr id="15" name="TextBox 14"/>
+          <p:cNvPr id="18" name="TextBox 17"/>
           <p:cNvSpPr txBox="1"/>
           <p:nvPr/>
         </p:nvSpPr>
@@ -24255,7 +26878,7 @@
       </p:sp>
       <p:sp>
         <p:nvSpPr>
-          <p:cNvPr id="16" name="Oval 15"/>
+          <p:cNvPr id="19" name="Oval 18"/>
           <p:cNvSpPr/>
           <p:nvPr/>
         </p:nvSpPr>
@@ -24308,7 +26931,7 @@
       </p:sp>
       <p:sp>
         <p:nvSpPr>
-          <p:cNvPr id="17" name="TextBox 16"/>
+          <p:cNvPr id="20" name="TextBox 19"/>
           <p:cNvSpPr txBox="1"/>
           <p:nvPr/>
         </p:nvSpPr>
